--- a/Project Summary.pptx
+++ b/Project Summary.pptx
@@ -242,7 +242,7 @@
           <a:p>
             <a:fld id="{E7136F79-C8A2-40FF-A8FD-00B7746E44E9}" type="datetimeFigureOut">
               <a:rPr lang="en-IN" smtClean="0"/>
-              <a:t>28-05-2026</a:t>
+              <a:t>08-06-2026</a:t>
             </a:fld>
             <a:endParaRPr lang="en-IN"/>
           </a:p>
@@ -419,7 +419,7 @@
           <a:p>
             <a:fld id="{179C3803-45FF-498C-80B5-BC0E00E8DE4D}" type="datetimeFigureOut">
               <a:rPr lang="en-IN" smtClean="0"/>
-              <a:t>28-05-2026</a:t>
+              <a:t>08-06-2026</a:t>
             </a:fld>
             <a:endParaRPr lang="en-IN"/>
           </a:p>
@@ -836,7 +836,7 @@
           <a:p>
             <a:fld id="{B4A2A89E-D439-41FF-B41E-56DAAFB69416}" type="datetimeFigureOut">
               <a:rPr lang="en-IN" smtClean="0"/>
-              <a:t>28-05-2026</a:t>
+              <a:t>08-06-2026</a:t>
             </a:fld>
             <a:endParaRPr lang="en-IN"/>
           </a:p>
@@ -1036,7 +1036,7 @@
           <a:p>
             <a:fld id="{B4A2A89E-D439-41FF-B41E-56DAAFB69416}" type="datetimeFigureOut">
               <a:rPr lang="en-IN" smtClean="0"/>
-              <a:t>28-05-2026</a:t>
+              <a:t>08-06-2026</a:t>
             </a:fld>
             <a:endParaRPr lang="en-IN"/>
           </a:p>
@@ -1246,7 +1246,7 @@
           <a:p>
             <a:fld id="{B4A2A89E-D439-41FF-B41E-56DAAFB69416}" type="datetimeFigureOut">
               <a:rPr lang="en-IN" smtClean="0"/>
-              <a:t>28-05-2026</a:t>
+              <a:t>08-06-2026</a:t>
             </a:fld>
             <a:endParaRPr lang="en-IN"/>
           </a:p>
@@ -1446,7 +1446,7 @@
           <a:p>
             <a:fld id="{B4A2A89E-D439-41FF-B41E-56DAAFB69416}" type="datetimeFigureOut">
               <a:rPr lang="en-IN" smtClean="0"/>
-              <a:t>28-05-2026</a:t>
+              <a:t>08-06-2026</a:t>
             </a:fld>
             <a:endParaRPr lang="en-IN"/>
           </a:p>
@@ -1722,7 +1722,7 @@
           <a:p>
             <a:fld id="{B4A2A89E-D439-41FF-B41E-56DAAFB69416}" type="datetimeFigureOut">
               <a:rPr lang="en-IN" smtClean="0"/>
-              <a:t>28-05-2026</a:t>
+              <a:t>08-06-2026</a:t>
             </a:fld>
             <a:endParaRPr lang="en-IN"/>
           </a:p>
@@ -1990,7 +1990,7 @@
           <a:p>
             <a:fld id="{B4A2A89E-D439-41FF-B41E-56DAAFB69416}" type="datetimeFigureOut">
               <a:rPr lang="en-IN" smtClean="0"/>
-              <a:t>28-05-2026</a:t>
+              <a:t>08-06-2026</a:t>
             </a:fld>
             <a:endParaRPr lang="en-IN"/>
           </a:p>
@@ -2405,7 +2405,7 @@
           <a:p>
             <a:fld id="{B4A2A89E-D439-41FF-B41E-56DAAFB69416}" type="datetimeFigureOut">
               <a:rPr lang="en-IN" smtClean="0"/>
-              <a:t>28-05-2026</a:t>
+              <a:t>08-06-2026</a:t>
             </a:fld>
             <a:endParaRPr lang="en-IN"/>
           </a:p>
@@ -2547,7 +2547,7 @@
           <a:p>
             <a:fld id="{B4A2A89E-D439-41FF-B41E-56DAAFB69416}" type="datetimeFigureOut">
               <a:rPr lang="en-IN" smtClean="0"/>
-              <a:t>28-05-2026</a:t>
+              <a:t>08-06-2026</a:t>
             </a:fld>
             <a:endParaRPr lang="en-IN"/>
           </a:p>
@@ -2660,7 +2660,7 @@
           <a:p>
             <a:fld id="{B4A2A89E-D439-41FF-B41E-56DAAFB69416}" type="datetimeFigureOut">
               <a:rPr lang="en-IN" smtClean="0"/>
-              <a:t>28-05-2026</a:t>
+              <a:t>08-06-2026</a:t>
             </a:fld>
             <a:endParaRPr lang="en-IN"/>
           </a:p>
@@ -2973,7 +2973,7 @@
           <a:p>
             <a:fld id="{B4A2A89E-D439-41FF-B41E-56DAAFB69416}" type="datetimeFigureOut">
               <a:rPr lang="en-IN" smtClean="0"/>
-              <a:t>28-05-2026</a:t>
+              <a:t>08-06-2026</a:t>
             </a:fld>
             <a:endParaRPr lang="en-IN"/>
           </a:p>
@@ -3262,7 +3262,7 @@
           <a:p>
             <a:fld id="{B4A2A89E-D439-41FF-B41E-56DAAFB69416}" type="datetimeFigureOut">
               <a:rPr lang="en-IN" smtClean="0"/>
-              <a:t>28-05-2026</a:t>
+              <a:t>08-06-2026</a:t>
             </a:fld>
             <a:endParaRPr lang="en-IN"/>
           </a:p>
@@ -3505,7 +3505,7 @@
           <a:p>
             <a:fld id="{B4A2A89E-D439-41FF-B41E-56DAAFB69416}" type="datetimeFigureOut">
               <a:rPr lang="en-IN" smtClean="0"/>
-              <a:t>28-05-2026</a:t>
+              <a:t>08-06-2026</a:t>
             </a:fld>
             <a:endParaRPr lang="en-IN"/>
           </a:p>
@@ -4435,43 +4435,6 @@
           </a:ln>
         </p:spPr>
       </p:pic>
-      <p:pic>
-        <p:nvPicPr>
-          <p:cNvPr id="6" name="Content Placeholder 5">
-            <a:extLst>
-              <a:ext uri="{FF2B5EF4-FFF2-40B4-BE49-F238E27FC236}">
-                <a16:creationId xmlns:a16="http://schemas.microsoft.com/office/drawing/2014/main" id="{D5CD1D57-63A0-1F29-4959-52579CF88889}"/>
-              </a:ext>
-            </a:extLst>
-          </p:cNvPr>
-          <p:cNvPicPr>
-            <a:picLocks noGrp="1"/>
-          </p:cNvPicPr>
-          <p:nvPr>
-            <p:ph sz="half" idx="2"/>
-          </p:nvPr>
-        </p:nvPicPr>
-        <p:blipFill>
-          <a:blip r:embed="rId3"/>
-          <a:stretch>
-            <a:fillRect/>
-          </a:stretch>
-        </p:blipFill>
-        <p:spPr>
-          <a:xfrm>
-            <a:off x="5739318" y="3161488"/>
-            <a:ext cx="5029199" cy="2288919"/>
-          </a:xfrm>
-          <a:prstGeom prst="rect">
-            <a:avLst/>
-          </a:prstGeom>
-          <a:ln>
-            <a:solidFill>
-              <a:schemeClr val="tx1"/>
-            </a:solidFill>
-          </a:ln>
-        </p:spPr>
-      </p:pic>
       <p:sp>
         <p:nvSpPr>
           <p:cNvPr id="8" name="TextBox 7">
@@ -4525,6 +4488,41 @@
             <a:extLst>
               <a:ext uri="{FF2B5EF4-FFF2-40B4-BE49-F238E27FC236}">
                 <a16:creationId xmlns:a16="http://schemas.microsoft.com/office/drawing/2014/main" id="{3EF7D042-E8A0-4D17-E9B5-FD7AB7B24F2A}"/>
+              </a:ext>
+            </a:extLst>
+          </p:cNvPr>
+          <p:cNvPicPr>
+            <a:picLocks noChangeAspect="1"/>
+          </p:cNvPicPr>
+          <p:nvPr/>
+        </p:nvPicPr>
+        <p:blipFill>
+          <a:blip r:embed="rId3"/>
+          <a:stretch>
+            <a:fillRect/>
+          </a:stretch>
+        </p:blipFill>
+        <p:spPr>
+          <a:xfrm>
+            <a:off x="651753" y="583659"/>
+            <a:ext cx="4377447" cy="2316185"/>
+          </a:xfrm>
+          <a:prstGeom prst="rect">
+            <a:avLst/>
+          </a:prstGeom>
+          <a:ln>
+            <a:solidFill>
+              <a:schemeClr val="tx1"/>
+            </a:solidFill>
+          </a:ln>
+        </p:spPr>
+      </p:pic>
+      <p:pic>
+        <p:nvPicPr>
+          <p:cNvPr id="9" name="Picture 8">
+            <a:extLst>
+              <a:ext uri="{FF2B5EF4-FFF2-40B4-BE49-F238E27FC236}">
+                <a16:creationId xmlns:a16="http://schemas.microsoft.com/office/drawing/2014/main" id="{BE809714-63EF-DBAC-A5DA-9EB7CA88A9A0}"/>
               </a:ext>
             </a:extLst>
           </p:cNvPr>
@@ -4541,8 +4539,8 @@
         </p:blipFill>
         <p:spPr>
           <a:xfrm>
-            <a:off x="651753" y="583659"/>
-            <a:ext cx="4377447" cy="2316185"/>
+            <a:off x="5739319" y="583659"/>
+            <a:ext cx="5029199" cy="2316185"/>
           </a:xfrm>
           <a:prstGeom prst="rect">
             <a:avLst/>
@@ -4556,37 +4554,54 @@
       </p:pic>
       <p:pic>
         <p:nvPicPr>
-          <p:cNvPr id="9" name="Picture 8">
-            <a:extLst>
-              <a:ext uri="{FF2B5EF4-FFF2-40B4-BE49-F238E27FC236}">
-                <a16:creationId xmlns:a16="http://schemas.microsoft.com/office/drawing/2014/main" id="{BE809714-63EF-DBAC-A5DA-9EB7CA88A9A0}"/>
+          <p:cNvPr id="5124" name="Picture 4">
+            <a:extLst>
+              <a:ext uri="{FF2B5EF4-FFF2-40B4-BE49-F238E27FC236}">
+                <a16:creationId xmlns:a16="http://schemas.microsoft.com/office/drawing/2014/main" id="{24E55736-C7AD-0999-FB59-EE7ECC21469F}"/>
               </a:ext>
             </a:extLst>
           </p:cNvPr>
           <p:cNvPicPr>
-            <a:picLocks noChangeAspect="1"/>
+            <a:picLocks noChangeAspect="1" noChangeArrowheads="1"/>
           </p:cNvPicPr>
           <p:nvPr/>
         </p:nvPicPr>
         <p:blipFill>
-          <a:blip r:embed="rId5"/>
+          <a:blip r:embed="rId5">
+            <a:extLst>
+              <a:ext uri="{28A0092B-C50C-407E-A947-70E740481C1C}">
+                <a14:useLocalDpi xmlns:a14="http://schemas.microsoft.com/office/drawing/2010/main" val="0"/>
+              </a:ext>
+            </a:extLst>
+          </a:blip>
+          <a:srcRect/>
           <a:stretch>
             <a:fillRect/>
           </a:stretch>
         </p:blipFill>
-        <p:spPr>
-          <a:xfrm>
-            <a:off x="5739319" y="583659"/>
-            <a:ext cx="5029199" cy="2316185"/>
+        <p:spPr bwMode="auto">
+          <a:xfrm>
+            <a:off x="5739319" y="3161488"/>
+            <a:ext cx="5029198" cy="2288919"/>
           </a:xfrm>
           <a:prstGeom prst="rect">
             <a:avLst/>
           </a:prstGeom>
+          <a:noFill/>
           <a:ln>
             <a:solidFill>
               <a:schemeClr val="tx1"/>
             </a:solidFill>
           </a:ln>
+          <a:extLst>
+            <a:ext uri="{909E8E84-426E-40DD-AFC4-6F175D3DCCD1}">
+              <a14:hiddenFill xmlns:a14="http://schemas.microsoft.com/office/drawing/2010/main">
+                <a:solidFill>
+                  <a:srgbClr val="FFFFFF"/>
+                </a:solidFill>
+              </a14:hiddenFill>
+            </a:ext>
+          </a:extLst>
         </p:spPr>
       </p:pic>
     </p:spTree>
@@ -4695,39 +4710,6 @@
           </a:ln>
         </p:spPr>
       </p:pic>
-      <p:pic>
-        <p:nvPicPr>
-          <p:cNvPr id="6" name="Picture 5">
-            <a:extLst>
-              <a:ext uri="{FF2B5EF4-FFF2-40B4-BE49-F238E27FC236}">
-                <a16:creationId xmlns:a16="http://schemas.microsoft.com/office/drawing/2014/main" id="{0418D0FC-A099-5E85-22F2-0BB89D9D5DDB}"/>
-              </a:ext>
-            </a:extLst>
-          </p:cNvPr>
-          <p:cNvPicPr/>
-          <p:nvPr/>
-        </p:nvPicPr>
-        <p:blipFill>
-          <a:blip r:embed="rId3"/>
-          <a:stretch>
-            <a:fillRect/>
-          </a:stretch>
-        </p:blipFill>
-        <p:spPr>
-          <a:xfrm>
-            <a:off x="5758774" y="3659030"/>
-            <a:ext cx="5176478" cy="1857984"/>
-          </a:xfrm>
-          <a:prstGeom prst="rect">
-            <a:avLst/>
-          </a:prstGeom>
-          <a:ln>
-            <a:solidFill>
-              <a:schemeClr val="tx1"/>
-            </a:solidFill>
-          </a:ln>
-        </p:spPr>
-      </p:pic>
       <p:sp>
         <p:nvSpPr>
           <p:cNvPr id="7" name="TextBox 6">
@@ -4781,6 +4763,41 @@
             <a:extLst>
               <a:ext uri="{FF2B5EF4-FFF2-40B4-BE49-F238E27FC236}">
                 <a16:creationId xmlns:a16="http://schemas.microsoft.com/office/drawing/2014/main" id="{28559849-DDD3-FC53-6E33-EE6784442AF4}"/>
+              </a:ext>
+            </a:extLst>
+          </p:cNvPr>
+          <p:cNvPicPr>
+            <a:picLocks noChangeAspect="1"/>
+          </p:cNvPicPr>
+          <p:nvPr/>
+        </p:nvPicPr>
+        <p:blipFill>
+          <a:blip r:embed="rId3"/>
+          <a:stretch>
+            <a:fillRect/>
+          </a:stretch>
+        </p:blipFill>
+        <p:spPr>
+          <a:xfrm>
+            <a:off x="561474" y="827833"/>
+            <a:ext cx="4516364" cy="2601167"/>
+          </a:xfrm>
+          <a:prstGeom prst="rect">
+            <a:avLst/>
+          </a:prstGeom>
+          <a:ln>
+            <a:solidFill>
+              <a:schemeClr val="tx1"/>
+            </a:solidFill>
+          </a:ln>
+        </p:spPr>
+      </p:pic>
+      <p:pic>
+        <p:nvPicPr>
+          <p:cNvPr id="9" name="Picture 8">
+            <a:extLst>
+              <a:ext uri="{FF2B5EF4-FFF2-40B4-BE49-F238E27FC236}">
+                <a16:creationId xmlns:a16="http://schemas.microsoft.com/office/drawing/2014/main" id="{2D092308-43F5-EFF9-A552-3B7936CE9D2C}"/>
               </a:ext>
             </a:extLst>
           </p:cNvPr>
@@ -4797,8 +4814,8 @@
         </p:blipFill>
         <p:spPr>
           <a:xfrm>
-            <a:off x="561474" y="827833"/>
-            <a:ext cx="4516364" cy="2601167"/>
+            <a:off x="5758775" y="827833"/>
+            <a:ext cx="5176478" cy="2601167"/>
           </a:xfrm>
           <a:prstGeom prst="rect">
             <a:avLst/>
@@ -4812,37 +4829,54 @@
       </p:pic>
       <p:pic>
         <p:nvPicPr>
-          <p:cNvPr id="9" name="Picture 8">
-            <a:extLst>
-              <a:ext uri="{FF2B5EF4-FFF2-40B4-BE49-F238E27FC236}">
-                <a16:creationId xmlns:a16="http://schemas.microsoft.com/office/drawing/2014/main" id="{2D092308-43F5-EFF9-A552-3B7936CE9D2C}"/>
+          <p:cNvPr id="6146" name="Picture 2">
+            <a:extLst>
+              <a:ext uri="{FF2B5EF4-FFF2-40B4-BE49-F238E27FC236}">
+                <a16:creationId xmlns:a16="http://schemas.microsoft.com/office/drawing/2014/main" id="{27C640A8-5C5D-5070-9005-79BD27CC115A}"/>
               </a:ext>
             </a:extLst>
           </p:cNvPr>
           <p:cNvPicPr>
-            <a:picLocks noChangeAspect="1"/>
+            <a:picLocks noChangeAspect="1" noChangeArrowheads="1"/>
           </p:cNvPicPr>
           <p:nvPr/>
         </p:nvPicPr>
         <p:blipFill>
-          <a:blip r:embed="rId5"/>
+          <a:blip r:embed="rId5">
+            <a:extLst>
+              <a:ext uri="{28A0092B-C50C-407E-A947-70E740481C1C}">
+                <a14:useLocalDpi xmlns:a14="http://schemas.microsoft.com/office/drawing/2010/main" val="0"/>
+              </a:ext>
+            </a:extLst>
+          </a:blip>
+          <a:srcRect/>
           <a:stretch>
             <a:fillRect/>
           </a:stretch>
         </p:blipFill>
-        <p:spPr>
-          <a:xfrm>
-            <a:off x="5758775" y="827833"/>
-            <a:ext cx="5176478" cy="2601167"/>
+        <p:spPr bwMode="auto">
+          <a:xfrm>
+            <a:off x="5758775" y="3549014"/>
+            <a:ext cx="5176477" cy="1898475"/>
           </a:xfrm>
           <a:prstGeom prst="rect">
             <a:avLst/>
           </a:prstGeom>
+          <a:noFill/>
           <a:ln>
             <a:solidFill>
               <a:schemeClr val="tx1"/>
             </a:solidFill>
           </a:ln>
+          <a:extLst>
+            <a:ext uri="{909E8E84-426E-40DD-AFC4-6F175D3DCCD1}">
+              <a14:hiddenFill xmlns:a14="http://schemas.microsoft.com/office/drawing/2010/main">
+                <a:solidFill>
+                  <a:srgbClr val="FFFFFF"/>
+                </a:solidFill>
+              </a14:hiddenFill>
+            </a:ext>
+          </a:extLst>
         </p:spPr>
       </p:pic>
     </p:spTree>
@@ -4928,8 +4962,8 @@
         </p:nvSpPr>
         <p:spPr>
           <a:xfrm>
-            <a:off x="695826" y="5749172"/>
-            <a:ext cx="10119563" cy="1077218"/>
+            <a:off x="695826" y="5975895"/>
+            <a:ext cx="10119563" cy="707886"/>
           </a:xfrm>
           <a:prstGeom prst="rect">
             <a:avLst/>
@@ -4959,9 +4993,6 @@
               <a:rPr lang="en-IN" sz="2000" dirty="0"/>
               <a:t>: Sales grew steadily month after month in 2017. This shows healthy,  continuous growth without any slow periods.</a:t>
             </a:r>
-          </a:p>
-          <a:p>
-            <a:endParaRPr lang="en-IN" sz="2400" dirty="0"/>
           </a:p>
         </p:txBody>
       </p:sp>
@@ -5092,8 +5123,8 @@
         </p:blipFill>
         <p:spPr>
           <a:xfrm>
-            <a:off x="5963596" y="528162"/>
-            <a:ext cx="4786009" cy="2611403"/>
+            <a:off x="5897814" y="528162"/>
+            <a:ext cx="4851791" cy="2611403"/>
           </a:xfrm>
           <a:prstGeom prst="rect">
             <a:avLst/>
@@ -5463,10 +5494,10 @@
       </p:sp>
       <p:pic>
         <p:nvPicPr>
-          <p:cNvPr id="5" name="Content Placeholder 4">
-            <a:extLst>
-              <a:ext uri="{FF2B5EF4-FFF2-40B4-BE49-F238E27FC236}">
-                <a16:creationId xmlns:a16="http://schemas.microsoft.com/office/drawing/2014/main" id="{CCEEBB8B-7EE6-670C-5BD7-7B3235CE9B1E}"/>
+          <p:cNvPr id="6" name="Content Placeholder 5">
+            <a:extLst>
+              <a:ext uri="{FF2B5EF4-FFF2-40B4-BE49-F238E27FC236}">
+                <a16:creationId xmlns:a16="http://schemas.microsoft.com/office/drawing/2014/main" id="{0DD94AF6-4058-D7E1-A743-9C9926109EC1}"/>
               </a:ext>
             </a:extLst>
           </p:cNvPr>
@@ -5474,55 +5505,11 @@
             <a:picLocks noGrp="1" noChangeAspect="1"/>
           </p:cNvPicPr>
           <p:nvPr>
-            <p:ph sz="half" idx="1"/>
+            <p:ph sz="half" idx="2"/>
           </p:nvPr>
         </p:nvPicPr>
         <p:blipFill>
           <a:blip r:embed="rId2">
-            <a:extLst>
-              <a:ext uri="{28A0092B-C50C-407E-A947-70E740481C1C}">
-                <a14:useLocalDpi xmlns:a14="http://schemas.microsoft.com/office/drawing/2010/main" val="0"/>
-              </a:ext>
-            </a:extLst>
-          </a:blip>
-          <a:srcRect r="19838"/>
-          <a:stretch>
-            <a:fillRect/>
-          </a:stretch>
-        </p:blipFill>
-        <p:spPr>
-          <a:xfrm>
-            <a:off x="583570" y="3185702"/>
-            <a:ext cx="3910609" cy="2378518"/>
-          </a:xfrm>
-          <a:prstGeom prst="rect">
-            <a:avLst/>
-          </a:prstGeom>
-          <a:ln>
-            <a:solidFill>
-              <a:schemeClr val="tx1"/>
-            </a:solidFill>
-          </a:ln>
-        </p:spPr>
-      </p:pic>
-      <p:pic>
-        <p:nvPicPr>
-          <p:cNvPr id="6" name="Content Placeholder 5">
-            <a:extLst>
-              <a:ext uri="{FF2B5EF4-FFF2-40B4-BE49-F238E27FC236}">
-                <a16:creationId xmlns:a16="http://schemas.microsoft.com/office/drawing/2014/main" id="{0DD94AF6-4058-D7E1-A743-9C9926109EC1}"/>
-              </a:ext>
-            </a:extLst>
-          </p:cNvPr>
-          <p:cNvPicPr>
-            <a:picLocks noGrp="1" noChangeAspect="1"/>
-          </p:cNvPicPr>
-          <p:nvPr>
-            <p:ph sz="half" idx="2"/>
-          </p:nvPr>
-        </p:nvPicPr>
-        <p:blipFill>
-          <a:blip r:embed="rId3">
             <a:extLst>
               <a:ext uri="{28A0092B-C50C-407E-A947-70E740481C1C}">
                 <a14:useLocalDpi xmlns:a14="http://schemas.microsoft.com/office/drawing/2010/main" val="0"/>
@@ -5608,7 +5595,7 @@
           <p:nvPr/>
         </p:nvPicPr>
         <p:blipFill>
-          <a:blip r:embed="rId4">
+          <a:blip r:embed="rId3">
             <a:extLst>
               <a:ext uri="{28A0092B-C50C-407E-A947-70E740481C1C}">
                 <a14:useLocalDpi xmlns:a14="http://schemas.microsoft.com/office/drawing/2010/main" val="0"/>
@@ -5621,8 +5608,8 @@
         </p:blipFill>
         <p:spPr>
           <a:xfrm>
-            <a:off x="5603131" y="554149"/>
-            <a:ext cx="4620639" cy="2171681"/>
+            <a:off x="579841" y="611307"/>
+            <a:ext cx="3910610" cy="2171681"/>
           </a:xfrm>
           <a:prstGeom prst="rect">
             <a:avLst/>
@@ -5649,7 +5636,7 @@
           <p:nvPr/>
         </p:nvPicPr>
         <p:blipFill>
-          <a:blip r:embed="rId5">
+          <a:blip r:embed="rId4">
             <a:extLst>
               <a:ext uri="{28A0092B-C50C-407E-A947-70E740481C1C}">
                 <a14:useLocalDpi xmlns:a14="http://schemas.microsoft.com/office/drawing/2010/main" val="0"/>
@@ -5662,8 +5649,49 @@
         </p:blipFill>
         <p:spPr>
           <a:xfrm>
-            <a:off x="583569" y="554148"/>
-            <a:ext cx="3910609" cy="2171681"/>
+            <a:off x="5603132" y="611306"/>
+            <a:ext cx="4620638" cy="2171681"/>
+          </a:xfrm>
+          <a:prstGeom prst="rect">
+            <a:avLst/>
+          </a:prstGeom>
+          <a:ln>
+            <a:solidFill>
+              <a:schemeClr val="tx1"/>
+            </a:solidFill>
+          </a:ln>
+        </p:spPr>
+      </p:pic>
+      <p:pic>
+        <p:nvPicPr>
+          <p:cNvPr id="11" name="Picture 10">
+            <a:extLst>
+              <a:ext uri="{FF2B5EF4-FFF2-40B4-BE49-F238E27FC236}">
+                <a16:creationId xmlns:a16="http://schemas.microsoft.com/office/drawing/2014/main" id="{DB5F32CA-AA42-FFFF-F1DE-E5F6EB2BE114}"/>
+              </a:ext>
+            </a:extLst>
+          </p:cNvPr>
+          <p:cNvPicPr>
+            <a:picLocks noChangeAspect="1"/>
+          </p:cNvPicPr>
+          <p:nvPr/>
+        </p:nvPicPr>
+        <p:blipFill>
+          <a:blip r:embed="rId5">
+            <a:extLst>
+              <a:ext uri="{28A0092B-C50C-407E-A947-70E740481C1C}">
+                <a14:useLocalDpi xmlns:a14="http://schemas.microsoft.com/office/drawing/2010/main" val="0"/>
+              </a:ext>
+            </a:extLst>
+          </a:blip>
+          <a:stretch>
+            <a:fillRect/>
+          </a:stretch>
+        </p:blipFill>
+        <p:spPr>
+          <a:xfrm>
+            <a:off x="579841" y="3185700"/>
+            <a:ext cx="3910610" cy="2378519"/>
           </a:xfrm>
           <a:prstGeom prst="rect">
             <a:avLst/>
@@ -6533,39 +6561,22 @@
           </a:extLst>
         </p:spPr>
       </p:pic>
-      <p:pic>
-        <p:nvPicPr>
-          <p:cNvPr id="6" name="Content Placeholder 5">
-            <a:extLst>
-              <a:ext uri="{FF2B5EF4-FFF2-40B4-BE49-F238E27FC236}">
-                <a16:creationId xmlns:a16="http://schemas.microsoft.com/office/drawing/2014/main" id="{8DBFE041-71C6-0E6F-558E-1ED6DDE6FE61}"/>
-              </a:ext>
-            </a:extLst>
-          </p:cNvPr>
-          <p:cNvPicPr>
-            <a:picLocks noGrp="1" noChangeAspect="1"/>
-          </p:cNvPicPr>
-          <p:nvPr>
-            <p:ph sz="half" idx="2"/>
-          </p:nvPr>
-        </p:nvPicPr>
-        <p:blipFill>
-          <a:blip r:embed="rId3">
-            <a:extLst>
-              <a:ext uri="{28A0092B-C50C-407E-A947-70E740481C1C}">
-                <a14:useLocalDpi xmlns:a14="http://schemas.microsoft.com/office/drawing/2010/main" val="0"/>
-              </a:ext>
-            </a:extLst>
-          </a:blip>
-          <a:srcRect/>
-          <a:stretch>
-            <a:fillRect/>
-          </a:stretch>
-        </p:blipFill>
-        <p:spPr bwMode="auto">
-          <a:xfrm>
-            <a:off x="5963055" y="3543351"/>
-            <a:ext cx="4971251" cy="2232818"/>
+      <p:sp>
+        <p:nvSpPr>
+          <p:cNvPr id="7" name="TextBox 6">
+            <a:extLst>
+              <a:ext uri="{FF2B5EF4-FFF2-40B4-BE49-F238E27FC236}">
+                <a16:creationId xmlns:a16="http://schemas.microsoft.com/office/drawing/2014/main" id="{CBD4E895-EF1F-DD80-BBE3-E2DCD686CF25}"/>
+              </a:ext>
+            </a:extLst>
+          </p:cNvPr>
+          <p:cNvSpPr txBox="1"/>
+          <p:nvPr/>
+        </p:nvSpPr>
+        <p:spPr>
+          <a:xfrm>
+            <a:off x="662894" y="5971326"/>
+            <a:ext cx="10225406" cy="738664"/>
           </a:xfrm>
           <a:prstGeom prst="rect">
             <a:avLst/>
@@ -6577,23 +6588,94 @@
             </a:solidFill>
           </a:ln>
         </p:spPr>
+        <p:txBody>
+          <a:bodyPr wrap="square" rtlCol="0">
+            <a:spAutoFit/>
+          </a:bodyPr>
+          <a:lstStyle/>
+          <a:p>
+            <a:r>
+              <a:rPr lang="en-IN" b="1" dirty="0"/>
+              <a:t>Insight</a:t>
+            </a:r>
+            <a:r>
+              <a:rPr lang="en-IN" dirty="0"/>
+              <a:t>: "Health Beauty" and "Watches" generate the highest sales. We should promote these items more on the homepage</a:t>
+            </a:r>
+            <a:r>
+              <a:rPr lang="en-IN" sz="2400" dirty="0"/>
+              <a:t>.</a:t>
+            </a:r>
+            <a:endParaRPr lang="en-IN" dirty="0"/>
+          </a:p>
+        </p:txBody>
+      </p:sp>
+      <p:pic>
+        <p:nvPicPr>
+          <p:cNvPr id="4" name="Picture 3">
+            <a:extLst>
+              <a:ext uri="{FF2B5EF4-FFF2-40B4-BE49-F238E27FC236}">
+                <a16:creationId xmlns:a16="http://schemas.microsoft.com/office/drawing/2014/main" id="{FDD90263-9ED5-98EE-2BEA-5E1C2DF926B3}"/>
+              </a:ext>
+            </a:extLst>
+          </p:cNvPr>
+          <p:cNvPicPr>
+            <a:picLocks noChangeAspect="1"/>
+          </p:cNvPicPr>
+          <p:nvPr/>
+        </p:nvPicPr>
+        <p:blipFill>
+          <a:blip r:embed="rId3"/>
+          <a:stretch>
+            <a:fillRect/>
+          </a:stretch>
+        </p:blipFill>
+        <p:spPr>
+          <a:xfrm>
+            <a:off x="662894" y="877569"/>
+            <a:ext cx="4581740" cy="2437078"/>
+          </a:xfrm>
+          <a:prstGeom prst="rect">
+            <a:avLst/>
+          </a:prstGeom>
+          <a:ln>
+            <a:solidFill>
+              <a:schemeClr val="tx1"/>
+            </a:solidFill>
+          </a:ln>
+        </p:spPr>
       </p:pic>
-      <p:sp>
-        <p:nvSpPr>
-          <p:cNvPr id="7" name="TextBox 6">
-            <a:extLst>
-              <a:ext uri="{FF2B5EF4-FFF2-40B4-BE49-F238E27FC236}">
-                <a16:creationId xmlns:a16="http://schemas.microsoft.com/office/drawing/2014/main" id="{CBD4E895-EF1F-DD80-BBE3-E2DCD686CF25}"/>
-              </a:ext>
-            </a:extLst>
-          </p:cNvPr>
-          <p:cNvSpPr txBox="1"/>
+      <p:pic>
+        <p:nvPicPr>
+          <p:cNvPr id="2050" name="Picture 2">
+            <a:extLst>
+              <a:ext uri="{FF2B5EF4-FFF2-40B4-BE49-F238E27FC236}">
+                <a16:creationId xmlns:a16="http://schemas.microsoft.com/office/drawing/2014/main" id="{252DAF97-28C3-653B-8F50-F380798B90E2}"/>
+              </a:ext>
+            </a:extLst>
+          </p:cNvPr>
+          <p:cNvPicPr>
+            <a:picLocks noChangeAspect="1" noChangeArrowheads="1"/>
+          </p:cNvPicPr>
           <p:nvPr/>
-        </p:nvSpPr>
-        <p:spPr>
-          <a:xfrm>
-            <a:off x="662894" y="5971326"/>
-            <a:ext cx="10225406" cy="738664"/>
+        </p:nvPicPr>
+        <p:blipFill>
+          <a:blip r:embed="rId4">
+            <a:extLst>
+              <a:ext uri="{28A0092B-C50C-407E-A947-70E740481C1C}">
+                <a14:useLocalDpi xmlns:a14="http://schemas.microsoft.com/office/drawing/2010/main" val="0"/>
+              </a:ext>
+            </a:extLst>
+          </a:blip>
+          <a:srcRect/>
+          <a:stretch>
+            <a:fillRect/>
+          </a:stretch>
+        </p:blipFill>
+        <p:spPr bwMode="auto">
+          <a:xfrm>
+            <a:off x="5963054" y="3543351"/>
+            <a:ext cx="4925245" cy="2216044"/>
           </a:xfrm>
           <a:prstGeom prst="rect">
             <a:avLst/>
@@ -6604,35 +6686,23 @@
               <a:schemeClr val="tx1"/>
             </a:solidFill>
           </a:ln>
-        </p:spPr>
-        <p:txBody>
-          <a:bodyPr wrap="square" rtlCol="0">
-            <a:spAutoFit/>
-          </a:bodyPr>
-          <a:lstStyle/>
-          <a:p>
-            <a:r>
-              <a:rPr lang="en-IN" b="1" dirty="0"/>
-              <a:t>Insight</a:t>
-            </a:r>
-            <a:r>
-              <a:rPr lang="en-IN" dirty="0"/>
-              <a:t>: "Health Beauty" and "Watches" generate the highest sales. We should promote these items more on the homepage</a:t>
-            </a:r>
-            <a:r>
-              <a:rPr lang="en-IN" sz="2400" dirty="0"/>
-              <a:t>.</a:t>
-            </a:r>
-            <a:endParaRPr lang="en-IN" dirty="0"/>
-          </a:p>
-        </p:txBody>
-      </p:sp>
+          <a:extLst>
+            <a:ext uri="{909E8E84-426E-40DD-AFC4-6F175D3DCCD1}">
+              <a14:hiddenFill xmlns:a14="http://schemas.microsoft.com/office/drawing/2010/main">
+                <a:solidFill>
+                  <a:srgbClr val="FFFFFF"/>
+                </a:solidFill>
+              </a14:hiddenFill>
+            </a:ext>
+          </a:extLst>
+        </p:spPr>
+      </p:pic>
       <p:pic>
         <p:nvPicPr>
-          <p:cNvPr id="8" name="Picture 7">
-            <a:extLst>
-              <a:ext uri="{FF2B5EF4-FFF2-40B4-BE49-F238E27FC236}">
-                <a16:creationId xmlns:a16="http://schemas.microsoft.com/office/drawing/2014/main" id="{6098CEB9-DF35-4302-DB89-5D5080CEB74F}"/>
+          <p:cNvPr id="11" name="Picture 10">
+            <a:extLst>
+              <a:ext uri="{FF2B5EF4-FFF2-40B4-BE49-F238E27FC236}">
+                <a16:creationId xmlns:a16="http://schemas.microsoft.com/office/drawing/2014/main" id="{80116125-B5F4-B452-7495-4A730CA795BF}"/>
               </a:ext>
             </a:extLst>
           </p:cNvPr>
@@ -6642,50 +6712,21 @@
           <p:nvPr/>
         </p:nvPicPr>
         <p:blipFill>
-          <a:blip r:embed="rId4"/>
+          <a:blip r:embed="rId5">
+            <a:extLst>
+              <a:ext uri="{28A0092B-C50C-407E-A947-70E740481C1C}">
+                <a14:useLocalDpi xmlns:a14="http://schemas.microsoft.com/office/drawing/2010/main" val="0"/>
+              </a:ext>
+            </a:extLst>
+          </a:blip>
           <a:stretch>
             <a:fillRect/>
           </a:stretch>
         </p:blipFill>
         <p:spPr>
           <a:xfrm>
-            <a:off x="5963055" y="877569"/>
-            <a:ext cx="4925245" cy="2453853"/>
-          </a:xfrm>
-          <a:prstGeom prst="rect">
-            <a:avLst/>
-          </a:prstGeom>
-          <a:ln>
-            <a:solidFill>
-              <a:schemeClr val="tx1"/>
-            </a:solidFill>
-          </a:ln>
-        </p:spPr>
-      </p:pic>
-      <p:pic>
-        <p:nvPicPr>
-          <p:cNvPr id="4" name="Picture 3">
-            <a:extLst>
-              <a:ext uri="{FF2B5EF4-FFF2-40B4-BE49-F238E27FC236}">
-                <a16:creationId xmlns:a16="http://schemas.microsoft.com/office/drawing/2014/main" id="{FDD90263-9ED5-98EE-2BEA-5E1C2DF926B3}"/>
-              </a:ext>
-            </a:extLst>
-          </p:cNvPr>
-          <p:cNvPicPr>
-            <a:picLocks noChangeAspect="1"/>
-          </p:cNvPicPr>
-          <p:nvPr/>
-        </p:nvPicPr>
-        <p:blipFill>
-          <a:blip r:embed="rId5"/>
-          <a:stretch>
-            <a:fillRect/>
-          </a:stretch>
-        </p:blipFill>
-        <p:spPr>
-          <a:xfrm>
-            <a:off x="662894" y="877569"/>
-            <a:ext cx="4581740" cy="2437078"/>
+            <a:off x="5963054" y="877569"/>
+            <a:ext cx="4925245" cy="2437078"/>
           </a:xfrm>
           <a:prstGeom prst="rect">
             <a:avLst/>
@@ -7324,83 +7365,22 @@
           </a:p>
         </p:txBody>
       </p:sp>
-      <p:pic>
-        <p:nvPicPr>
-          <p:cNvPr id="5" name="Content Placeholder 4">
-            <a:extLst>
-              <a:ext uri="{FF2B5EF4-FFF2-40B4-BE49-F238E27FC236}">
-                <a16:creationId xmlns:a16="http://schemas.microsoft.com/office/drawing/2014/main" id="{8CA491A3-80A9-0CBB-9564-25C3E977C2EC}"/>
-              </a:ext>
-            </a:extLst>
-          </p:cNvPr>
-          <p:cNvPicPr>
-            <a:picLocks noGrp="1" noChangeAspect="1"/>
-          </p:cNvPicPr>
-          <p:nvPr>
-            <p:ph sz="half" idx="1"/>
-          </p:nvPr>
-        </p:nvPicPr>
-        <p:blipFill>
-          <a:blip r:embed="rId2">
-            <a:extLst>
-              <a:ext uri="{28A0092B-C50C-407E-A947-70E740481C1C}">
-                <a14:useLocalDpi xmlns:a14="http://schemas.microsoft.com/office/drawing/2010/main" val="0"/>
-              </a:ext>
-            </a:extLst>
-          </a:blip>
-          <a:srcRect r="62725"/>
-          <a:stretch>
-            <a:fillRect/>
-          </a:stretch>
-        </p:blipFill>
-        <p:spPr>
-          <a:xfrm>
-            <a:off x="673022" y="3256499"/>
-            <a:ext cx="4005982" cy="2249961"/>
-          </a:xfrm>
-          <a:prstGeom prst="rect">
-            <a:avLst/>
-          </a:prstGeom>
-          <a:ln>
-            <a:solidFill>
-              <a:schemeClr val="tx1"/>
-            </a:solidFill>
-          </a:ln>
-        </p:spPr>
-      </p:pic>
-      <p:pic>
-        <p:nvPicPr>
-          <p:cNvPr id="6" name="Content Placeholder 5">
-            <a:extLst>
-              <a:ext uri="{FF2B5EF4-FFF2-40B4-BE49-F238E27FC236}">
-                <a16:creationId xmlns:a16="http://schemas.microsoft.com/office/drawing/2014/main" id="{219C6EB0-75DC-B8E9-67AC-9899E40C827D}"/>
-              </a:ext>
-            </a:extLst>
-          </p:cNvPr>
-          <p:cNvPicPr>
-            <a:picLocks noGrp="1" noChangeAspect="1"/>
-          </p:cNvPicPr>
-          <p:nvPr>
-            <p:ph sz="half" idx="2"/>
-          </p:nvPr>
-        </p:nvPicPr>
-        <p:blipFill>
-          <a:blip r:embed="rId3">
-            <a:extLst>
-              <a:ext uri="{28A0092B-C50C-407E-A947-70E740481C1C}">
-                <a14:useLocalDpi xmlns:a14="http://schemas.microsoft.com/office/drawing/2010/main" val="0"/>
-              </a:ext>
-            </a:extLst>
-          </a:blip>
-          <a:srcRect/>
-          <a:stretch>
-            <a:fillRect/>
-          </a:stretch>
-        </p:blipFill>
-        <p:spPr bwMode="auto">
-          <a:xfrm>
-            <a:off x="5807413" y="3256499"/>
-            <a:ext cx="5155659" cy="2249961"/>
+      <p:sp>
+        <p:nvSpPr>
+          <p:cNvPr id="7" name="TextBox 6">
+            <a:extLst>
+              <a:ext uri="{FF2B5EF4-FFF2-40B4-BE49-F238E27FC236}">
+                <a16:creationId xmlns:a16="http://schemas.microsoft.com/office/drawing/2014/main" id="{794DA0CC-BA8F-4AD4-D070-537461EEBCF2}"/>
+              </a:ext>
+            </a:extLst>
+          </p:cNvPr>
+          <p:cNvSpPr txBox="1"/>
+          <p:nvPr/>
+        </p:nvSpPr>
+        <p:spPr>
+          <a:xfrm>
+            <a:off x="651754" y="5866540"/>
+            <a:ext cx="10311318" cy="646331"/>
           </a:xfrm>
           <a:prstGeom prst="rect">
             <a:avLst/>
@@ -7412,23 +7392,54 @@
             </a:solidFill>
           </a:ln>
         </p:spPr>
-      </p:pic>
-      <p:sp>
-        <p:nvSpPr>
-          <p:cNvPr id="7" name="TextBox 6">
-            <a:extLst>
-              <a:ext uri="{FF2B5EF4-FFF2-40B4-BE49-F238E27FC236}">
-                <a16:creationId xmlns:a16="http://schemas.microsoft.com/office/drawing/2014/main" id="{794DA0CC-BA8F-4AD4-D070-537461EEBCF2}"/>
-              </a:ext>
-            </a:extLst>
-          </p:cNvPr>
-          <p:cNvSpPr txBox="1"/>
+        <p:txBody>
+          <a:bodyPr wrap="square" rtlCol="0">
+            <a:spAutoFit/>
+          </a:bodyPr>
+          <a:lstStyle/>
+          <a:p>
+            <a:r>
+              <a:rPr lang="en-IN" b="1" dirty="0"/>
+              <a:t>Insight</a:t>
+            </a:r>
+            <a:r>
+              <a:rPr lang="en-IN" dirty="0"/>
+              <a:t>: The state of Sao Paulo has the most customers by a huge margin. We are very  strong in this region compared to others. </a:t>
+            </a:r>
+          </a:p>
+        </p:txBody>
+      </p:sp>
+      <p:pic>
+        <p:nvPicPr>
+          <p:cNvPr id="3074" name="Picture 2">
+            <a:extLst>
+              <a:ext uri="{FF2B5EF4-FFF2-40B4-BE49-F238E27FC236}">
+                <a16:creationId xmlns:a16="http://schemas.microsoft.com/office/drawing/2014/main" id="{591F135F-FAA3-CF85-94C9-9DB227D53C56}"/>
+              </a:ext>
+            </a:extLst>
+          </p:cNvPr>
+          <p:cNvPicPr>
+            <a:picLocks noChangeAspect="1" noChangeArrowheads="1"/>
+          </p:cNvPicPr>
           <p:nvPr/>
-        </p:nvSpPr>
-        <p:spPr>
-          <a:xfrm>
-            <a:off x="651754" y="5705400"/>
-            <a:ext cx="10311318" cy="1015663"/>
+        </p:nvPicPr>
+        <p:blipFill>
+          <a:blip r:embed="rId2">
+            <a:extLst>
+              <a:ext uri="{28A0092B-C50C-407E-A947-70E740481C1C}">
+                <a14:useLocalDpi xmlns:a14="http://schemas.microsoft.com/office/drawing/2010/main" val="0"/>
+              </a:ext>
+            </a:extLst>
+          </a:blip>
+          <a:srcRect/>
+          <a:stretch>
+            <a:fillRect/>
+          </a:stretch>
+        </p:blipFill>
+        <p:spPr bwMode="auto">
+          <a:xfrm>
+            <a:off x="5730404" y="3169899"/>
+            <a:ext cx="5232668" cy="2336561"/>
           </a:xfrm>
           <a:prstGeom prst="rect">
             <a:avLst/>
@@ -7439,33 +7450,23 @@
               <a:schemeClr val="tx1"/>
             </a:solidFill>
           </a:ln>
-        </p:spPr>
-        <p:txBody>
-          <a:bodyPr wrap="square" rtlCol="0">
-            <a:spAutoFit/>
-          </a:bodyPr>
-          <a:lstStyle/>
-          <a:p>
-            <a:r>
-              <a:rPr lang="en-IN" b="1" dirty="0"/>
-              <a:t>Insight</a:t>
-            </a:r>
-            <a:r>
-              <a:rPr lang="en-IN" dirty="0"/>
-              <a:t>: The state of Sao Paulo has the most customers by a huge margin. We are very  strong in this region compared to others. </a:t>
-            </a:r>
-          </a:p>
-          <a:p>
-            <a:endParaRPr lang="en-IN" sz="2400" dirty="0"/>
-          </a:p>
-        </p:txBody>
-      </p:sp>
+          <a:extLst>
+            <a:ext uri="{909E8E84-426E-40DD-AFC4-6F175D3DCCD1}">
+              <a14:hiddenFill xmlns:a14="http://schemas.microsoft.com/office/drawing/2010/main">
+                <a:solidFill>
+                  <a:srgbClr val="FFFFFF"/>
+                </a:solidFill>
+              </a14:hiddenFill>
+            </a:ext>
+          </a:extLst>
+        </p:spPr>
+      </p:pic>
       <p:pic>
         <p:nvPicPr>
-          <p:cNvPr id="4" name="Picture 3">
-            <a:extLst>
-              <a:ext uri="{FF2B5EF4-FFF2-40B4-BE49-F238E27FC236}">
-                <a16:creationId xmlns:a16="http://schemas.microsoft.com/office/drawing/2014/main" id="{02EEBCC6-4BA5-F666-D0DD-1BA89497B1C6}"/>
+          <p:cNvPr id="11" name="Picture 10">
+            <a:extLst>
+              <a:ext uri="{FF2B5EF4-FFF2-40B4-BE49-F238E27FC236}">
+                <a16:creationId xmlns:a16="http://schemas.microsoft.com/office/drawing/2014/main" id="{2EFA995A-AAF8-86CE-109D-8D61D55E72B3}"/>
               </a:ext>
             </a:extLst>
           </p:cNvPr>
@@ -7475,15 +7476,21 @@
           <p:nvPr/>
         </p:nvPicPr>
         <p:blipFill>
-          <a:blip r:embed="rId4"/>
+          <a:blip r:embed="rId3">
+            <a:extLst>
+              <a:ext uri="{28A0092B-C50C-407E-A947-70E740481C1C}">
+                <a14:useLocalDpi xmlns:a14="http://schemas.microsoft.com/office/drawing/2010/main" val="0"/>
+              </a:ext>
+            </a:extLst>
+          </a:blip>
           <a:stretch>
             <a:fillRect/>
           </a:stretch>
         </p:blipFill>
         <p:spPr>
           <a:xfrm>
-            <a:off x="5730404" y="885217"/>
-            <a:ext cx="5232668" cy="1994384"/>
+            <a:off x="5730403" y="875274"/>
+            <a:ext cx="5232669" cy="1994385"/>
           </a:xfrm>
           <a:prstGeom prst="rect">
             <a:avLst/>
@@ -7497,10 +7504,53 @@
       </p:pic>
       <p:pic>
         <p:nvPicPr>
-          <p:cNvPr id="9" name="Picture 8">
-            <a:extLst>
-              <a:ext uri="{FF2B5EF4-FFF2-40B4-BE49-F238E27FC236}">
-                <a16:creationId xmlns:a16="http://schemas.microsoft.com/office/drawing/2014/main" id="{93F47564-FB44-FA96-F6EC-2918B4D1BF28}"/>
+          <p:cNvPr id="15" name="Content Placeholder 14">
+            <a:extLst>
+              <a:ext uri="{FF2B5EF4-FFF2-40B4-BE49-F238E27FC236}">
+                <a16:creationId xmlns:a16="http://schemas.microsoft.com/office/drawing/2014/main" id="{D85B2D98-F462-95DA-6D04-BF5BDEDCEF5B}"/>
+              </a:ext>
+            </a:extLst>
+          </p:cNvPr>
+          <p:cNvPicPr>
+            <a:picLocks noGrp="1" noChangeAspect="1"/>
+          </p:cNvPicPr>
+          <p:nvPr>
+            <p:ph sz="half" idx="1"/>
+          </p:nvPr>
+        </p:nvPicPr>
+        <p:blipFill>
+          <a:blip r:embed="rId4">
+            <a:extLst>
+              <a:ext uri="{28A0092B-C50C-407E-A947-70E740481C1C}">
+                <a14:useLocalDpi xmlns:a14="http://schemas.microsoft.com/office/drawing/2010/main" val="0"/>
+              </a:ext>
+            </a:extLst>
+          </a:blip>
+          <a:stretch>
+            <a:fillRect/>
+          </a:stretch>
+        </p:blipFill>
+        <p:spPr>
+          <a:xfrm>
+            <a:off x="673021" y="3039176"/>
+            <a:ext cx="4027251" cy="2467284"/>
+          </a:xfrm>
+          <a:prstGeom prst="rect">
+            <a:avLst/>
+          </a:prstGeom>
+          <a:ln>
+            <a:solidFill>
+              <a:schemeClr val="tx1"/>
+            </a:solidFill>
+          </a:ln>
+        </p:spPr>
+      </p:pic>
+      <p:pic>
+        <p:nvPicPr>
+          <p:cNvPr id="17" name="Picture 16">
+            <a:extLst>
+              <a:ext uri="{FF2B5EF4-FFF2-40B4-BE49-F238E27FC236}">
+                <a16:creationId xmlns:a16="http://schemas.microsoft.com/office/drawing/2014/main" id="{8B41F66C-382B-BB3E-3C0D-23F2D3F96370}"/>
               </a:ext>
             </a:extLst>
           </p:cNvPr>
@@ -7510,15 +7560,21 @@
           <p:nvPr/>
         </p:nvPicPr>
         <p:blipFill>
-          <a:blip r:embed="rId5"/>
+          <a:blip r:embed="rId5">
+            <a:extLst>
+              <a:ext uri="{28A0092B-C50C-407E-A947-70E740481C1C}">
+                <a14:useLocalDpi xmlns:a14="http://schemas.microsoft.com/office/drawing/2010/main" val="0"/>
+              </a:ext>
+            </a:extLst>
+          </a:blip>
           <a:stretch>
             <a:fillRect/>
           </a:stretch>
         </p:blipFill>
         <p:spPr>
           <a:xfrm>
-            <a:off x="673022" y="875274"/>
-            <a:ext cx="4027251" cy="1994385"/>
+            <a:off x="651754" y="875274"/>
+            <a:ext cx="4048519" cy="1994385"/>
           </a:xfrm>
           <a:prstGeom prst="rect">
             <a:avLst/>
@@ -7682,14 +7738,16 @@
       </p:pic>
       <p:pic>
         <p:nvPicPr>
-          <p:cNvPr id="6" name="Picture 5">
-            <a:extLst>
-              <a:ext uri="{FF2B5EF4-FFF2-40B4-BE49-F238E27FC236}">
-                <a16:creationId xmlns:a16="http://schemas.microsoft.com/office/drawing/2014/main" id="{B81BFF44-88F2-8D61-7712-A6076AAA9454}"/>
-              </a:ext>
-            </a:extLst>
-          </p:cNvPr>
-          <p:cNvPicPr/>
+          <p:cNvPr id="7" name="Picture 6">
+            <a:extLst>
+              <a:ext uri="{FF2B5EF4-FFF2-40B4-BE49-F238E27FC236}">
+                <a16:creationId xmlns:a16="http://schemas.microsoft.com/office/drawing/2014/main" id="{ABB1BE29-9166-089F-7B24-F5B3EE8F31D0}"/>
+              </a:ext>
+            </a:extLst>
+          </p:cNvPr>
+          <p:cNvPicPr>
+            <a:picLocks noChangeAspect="1"/>
+          </p:cNvPicPr>
           <p:nvPr/>
         </p:nvPicPr>
         <p:blipFill>
@@ -7700,8 +7758,8 @@
         </p:blipFill>
         <p:spPr>
           <a:xfrm>
-            <a:off x="6244075" y="3083226"/>
-            <a:ext cx="4582812" cy="2534863"/>
+            <a:off x="6244076" y="850373"/>
+            <a:ext cx="4582812" cy="1937326"/>
           </a:xfrm>
           <a:prstGeom prst="rect">
             <a:avLst/>
@@ -7715,10 +7773,10 @@
       </p:pic>
       <p:pic>
         <p:nvPicPr>
-          <p:cNvPr id="7" name="Picture 6">
-            <a:extLst>
-              <a:ext uri="{FF2B5EF4-FFF2-40B4-BE49-F238E27FC236}">
-                <a16:creationId xmlns:a16="http://schemas.microsoft.com/office/drawing/2014/main" id="{ABB1BE29-9166-089F-7B24-F5B3EE8F31D0}"/>
+          <p:cNvPr id="9" name="Picture 8">
+            <a:extLst>
+              <a:ext uri="{FF2B5EF4-FFF2-40B4-BE49-F238E27FC236}">
+                <a16:creationId xmlns:a16="http://schemas.microsoft.com/office/drawing/2014/main" id="{6AE553A6-E601-B455-A36C-BD1D2939AFF2}"/>
               </a:ext>
             </a:extLst>
           </p:cNvPr>
@@ -7735,8 +7793,8 @@
         </p:blipFill>
         <p:spPr>
           <a:xfrm>
-            <a:off x="6244076" y="850373"/>
-            <a:ext cx="4582812" cy="1937326"/>
+            <a:off x="525295" y="850373"/>
+            <a:ext cx="4075888" cy="1937326"/>
           </a:xfrm>
           <a:prstGeom prst="rect">
             <a:avLst/>
@@ -7750,37 +7808,54 @@
       </p:pic>
       <p:pic>
         <p:nvPicPr>
-          <p:cNvPr id="9" name="Picture 8">
-            <a:extLst>
-              <a:ext uri="{FF2B5EF4-FFF2-40B4-BE49-F238E27FC236}">
-                <a16:creationId xmlns:a16="http://schemas.microsoft.com/office/drawing/2014/main" id="{6AE553A6-E601-B455-A36C-BD1D2939AFF2}"/>
+          <p:cNvPr id="1028" name="Picture 4">
+            <a:extLst>
+              <a:ext uri="{FF2B5EF4-FFF2-40B4-BE49-F238E27FC236}">
+                <a16:creationId xmlns:a16="http://schemas.microsoft.com/office/drawing/2014/main" id="{556A4FCF-5BBB-57C4-5B55-E645587CF286}"/>
               </a:ext>
             </a:extLst>
           </p:cNvPr>
           <p:cNvPicPr>
-            <a:picLocks noChangeAspect="1"/>
+            <a:picLocks noChangeAspect="1" noChangeArrowheads="1"/>
           </p:cNvPicPr>
           <p:nvPr/>
         </p:nvPicPr>
         <p:blipFill>
-          <a:blip r:embed="rId5"/>
+          <a:blip r:embed="rId5">
+            <a:extLst>
+              <a:ext uri="{28A0092B-C50C-407E-A947-70E740481C1C}">
+                <a14:useLocalDpi xmlns:a14="http://schemas.microsoft.com/office/drawing/2010/main" val="0"/>
+              </a:ext>
+            </a:extLst>
+          </a:blip>
+          <a:srcRect/>
           <a:stretch>
             <a:fillRect/>
           </a:stretch>
         </p:blipFill>
-        <p:spPr>
-          <a:xfrm>
-            <a:off x="525295" y="850373"/>
-            <a:ext cx="4075888" cy="1937326"/>
+        <p:spPr bwMode="auto">
+          <a:xfrm>
+            <a:off x="6244075" y="2947275"/>
+            <a:ext cx="4582811" cy="2670814"/>
           </a:xfrm>
           <a:prstGeom prst="rect">
             <a:avLst/>
           </a:prstGeom>
+          <a:noFill/>
           <a:ln>
             <a:solidFill>
               <a:schemeClr val="tx1"/>
             </a:solidFill>
           </a:ln>
+          <a:extLst>
+            <a:ext uri="{909E8E84-426E-40DD-AFC4-6F175D3DCCD1}">
+              <a14:hiddenFill xmlns:a14="http://schemas.microsoft.com/office/drawing/2010/main">
+                <a:solidFill>
+                  <a:srgbClr val="FFFFFF"/>
+                </a:solidFill>
+              </a14:hiddenFill>
+            </a:ext>
+          </a:extLst>
         </p:spPr>
       </p:pic>
     </p:spTree>
@@ -8138,8 +8213,8 @@
         </p:blipFill>
         <p:spPr>
           <a:xfrm>
-            <a:off x="462226" y="3298272"/>
-            <a:ext cx="4275145" cy="2456231"/>
+            <a:off x="462226" y="3073940"/>
+            <a:ext cx="4275145" cy="2680563"/>
           </a:xfrm>
           <a:prstGeom prst="rect">
             <a:avLst/>
@@ -8198,22 +8273,90 @@
       </p:sp>
       <p:pic>
         <p:nvPicPr>
-          <p:cNvPr id="1026" name="Picture 2">
-            <a:extLst>
-              <a:ext uri="{FF2B5EF4-FFF2-40B4-BE49-F238E27FC236}">
-                <a16:creationId xmlns:a16="http://schemas.microsoft.com/office/drawing/2014/main" id="{4A649C0A-46A1-4760-FAA5-29DB3A72C3FE}"/>
+          <p:cNvPr id="4" name="Picture 3">
+            <a:extLst>
+              <a:ext uri="{FF2B5EF4-FFF2-40B4-BE49-F238E27FC236}">
+                <a16:creationId xmlns:a16="http://schemas.microsoft.com/office/drawing/2014/main" id="{5532CD6A-245F-7E2F-0DB1-F0C40248373A}"/>
               </a:ext>
             </a:extLst>
           </p:cNvPr>
           <p:cNvPicPr>
-            <a:picLocks noGrp="1" noChangeAspect="1" noChangeArrowheads="1"/>
+            <a:picLocks noChangeAspect="1"/>
           </p:cNvPicPr>
-          <p:nvPr>
-            <p:ph sz="half" idx="2"/>
-          </p:nvPr>
+          <p:nvPr/>
         </p:nvPicPr>
         <p:blipFill>
-          <a:blip r:embed="rId3">
+          <a:blip r:embed="rId3"/>
+          <a:stretch>
+            <a:fillRect/>
+          </a:stretch>
+        </p:blipFill>
+        <p:spPr>
+          <a:xfrm>
+            <a:off x="5311302" y="822688"/>
+            <a:ext cx="5780099" cy="1950889"/>
+          </a:xfrm>
+          <a:prstGeom prst="rect">
+            <a:avLst/>
+          </a:prstGeom>
+          <a:ln>
+            <a:solidFill>
+              <a:schemeClr val="tx1"/>
+            </a:solidFill>
+          </a:ln>
+        </p:spPr>
+      </p:pic>
+      <p:pic>
+        <p:nvPicPr>
+          <p:cNvPr id="8" name="Picture 7">
+            <a:extLst>
+              <a:ext uri="{FF2B5EF4-FFF2-40B4-BE49-F238E27FC236}">
+                <a16:creationId xmlns:a16="http://schemas.microsoft.com/office/drawing/2014/main" id="{33525252-4A2B-02FB-564A-C251262B3E24}"/>
+              </a:ext>
+            </a:extLst>
+          </p:cNvPr>
+          <p:cNvPicPr>
+            <a:picLocks noChangeAspect="1"/>
+          </p:cNvPicPr>
+          <p:nvPr/>
+        </p:nvPicPr>
+        <p:blipFill>
+          <a:blip r:embed="rId4"/>
+          <a:stretch>
+            <a:fillRect/>
+          </a:stretch>
+        </p:blipFill>
+        <p:spPr>
+          <a:xfrm>
+            <a:off x="462226" y="822687"/>
+            <a:ext cx="4275145" cy="1950889"/>
+          </a:xfrm>
+          <a:prstGeom prst="rect">
+            <a:avLst/>
+          </a:prstGeom>
+          <a:ln>
+            <a:solidFill>
+              <a:schemeClr val="tx1"/>
+            </a:solidFill>
+          </a:ln>
+        </p:spPr>
+      </p:pic>
+      <p:pic>
+        <p:nvPicPr>
+          <p:cNvPr id="4098" name="Picture 2">
+            <a:extLst>
+              <a:ext uri="{FF2B5EF4-FFF2-40B4-BE49-F238E27FC236}">
+                <a16:creationId xmlns:a16="http://schemas.microsoft.com/office/drawing/2014/main" id="{9EB0BBEE-FA29-B966-E5D2-161D8F91B28B}"/>
+              </a:ext>
+            </a:extLst>
+          </p:cNvPr>
+          <p:cNvPicPr>
+            <a:picLocks noChangeAspect="1" noChangeArrowheads="1"/>
+          </p:cNvPicPr>
+          <p:nvPr/>
+        </p:nvPicPr>
+        <p:blipFill>
+          <a:blip r:embed="rId5">
             <a:extLst>
               <a:ext uri="{28A0092B-C50C-407E-A947-70E740481C1C}">
                 <a14:useLocalDpi xmlns:a14="http://schemas.microsoft.com/office/drawing/2010/main" val="0"/>
@@ -8227,8 +8370,8 @@
         </p:blipFill>
         <p:spPr bwMode="auto">
           <a:xfrm>
-            <a:off x="5311303" y="3298271"/>
-            <a:ext cx="5780098" cy="2456232"/>
+            <a:off x="5311302" y="3073940"/>
+            <a:ext cx="5780098" cy="2680563"/>
           </a:xfrm>
           <a:prstGeom prst="rect">
             <a:avLst/>
@@ -8248,76 +8391,6 @@
               </a14:hiddenFill>
             </a:ext>
           </a:extLst>
-        </p:spPr>
-      </p:pic>
-      <p:pic>
-        <p:nvPicPr>
-          <p:cNvPr id="4" name="Picture 3">
-            <a:extLst>
-              <a:ext uri="{FF2B5EF4-FFF2-40B4-BE49-F238E27FC236}">
-                <a16:creationId xmlns:a16="http://schemas.microsoft.com/office/drawing/2014/main" id="{5532CD6A-245F-7E2F-0DB1-F0C40248373A}"/>
-              </a:ext>
-            </a:extLst>
-          </p:cNvPr>
-          <p:cNvPicPr>
-            <a:picLocks noChangeAspect="1"/>
-          </p:cNvPicPr>
-          <p:nvPr/>
-        </p:nvPicPr>
-        <p:blipFill>
-          <a:blip r:embed="rId4"/>
-          <a:stretch>
-            <a:fillRect/>
-          </a:stretch>
-        </p:blipFill>
-        <p:spPr>
-          <a:xfrm>
-            <a:off x="5311302" y="822688"/>
-            <a:ext cx="5780099" cy="1950889"/>
-          </a:xfrm>
-          <a:prstGeom prst="rect">
-            <a:avLst/>
-          </a:prstGeom>
-          <a:ln>
-            <a:solidFill>
-              <a:schemeClr val="tx1"/>
-            </a:solidFill>
-          </a:ln>
-        </p:spPr>
-      </p:pic>
-      <p:pic>
-        <p:nvPicPr>
-          <p:cNvPr id="8" name="Picture 7">
-            <a:extLst>
-              <a:ext uri="{FF2B5EF4-FFF2-40B4-BE49-F238E27FC236}">
-                <a16:creationId xmlns:a16="http://schemas.microsoft.com/office/drawing/2014/main" id="{33525252-4A2B-02FB-564A-C251262B3E24}"/>
-              </a:ext>
-            </a:extLst>
-          </p:cNvPr>
-          <p:cNvPicPr>
-            <a:picLocks noChangeAspect="1"/>
-          </p:cNvPicPr>
-          <p:nvPr/>
-        </p:nvPicPr>
-        <p:blipFill>
-          <a:blip r:embed="rId5"/>
-          <a:stretch>
-            <a:fillRect/>
-          </a:stretch>
-        </p:blipFill>
-        <p:spPr>
-          <a:xfrm>
-            <a:off x="462226" y="822687"/>
-            <a:ext cx="4275145" cy="1950889"/>
-          </a:xfrm>
-          <a:prstGeom prst="rect">
-            <a:avLst/>
-          </a:prstGeom>
-          <a:ln>
-            <a:solidFill>
-              <a:schemeClr val="tx1"/>
-            </a:solidFill>
-          </a:ln>
         </p:spPr>
       </p:pic>
     </p:spTree>

--- a/Project Summary.pptx
+++ b/Project Summary.pptx
@@ -242,7 +242,7 @@
           <a:p>
             <a:fld id="{E7136F79-C8A2-40FF-A8FD-00B7746E44E9}" type="datetimeFigureOut">
               <a:rPr lang="en-IN" smtClean="0"/>
-              <a:t>08-06-2026</a:t>
+              <a:t>10-06-2026</a:t>
             </a:fld>
             <a:endParaRPr lang="en-IN"/>
           </a:p>
@@ -419,7 +419,7 @@
           <a:p>
             <a:fld id="{179C3803-45FF-498C-80B5-BC0E00E8DE4D}" type="datetimeFigureOut">
               <a:rPr lang="en-IN" smtClean="0"/>
-              <a:t>08-06-2026</a:t>
+              <a:t>10-06-2026</a:t>
             </a:fld>
             <a:endParaRPr lang="en-IN"/>
           </a:p>
@@ -836,7 +836,7 @@
           <a:p>
             <a:fld id="{B4A2A89E-D439-41FF-B41E-56DAAFB69416}" type="datetimeFigureOut">
               <a:rPr lang="en-IN" smtClean="0"/>
-              <a:t>08-06-2026</a:t>
+              <a:t>10-06-2026</a:t>
             </a:fld>
             <a:endParaRPr lang="en-IN"/>
           </a:p>
@@ -1036,7 +1036,7 @@
           <a:p>
             <a:fld id="{B4A2A89E-D439-41FF-B41E-56DAAFB69416}" type="datetimeFigureOut">
               <a:rPr lang="en-IN" smtClean="0"/>
-              <a:t>08-06-2026</a:t>
+              <a:t>10-06-2026</a:t>
             </a:fld>
             <a:endParaRPr lang="en-IN"/>
           </a:p>
@@ -1246,7 +1246,7 @@
           <a:p>
             <a:fld id="{B4A2A89E-D439-41FF-B41E-56DAAFB69416}" type="datetimeFigureOut">
               <a:rPr lang="en-IN" smtClean="0"/>
-              <a:t>08-06-2026</a:t>
+              <a:t>10-06-2026</a:t>
             </a:fld>
             <a:endParaRPr lang="en-IN"/>
           </a:p>
@@ -1446,7 +1446,7 @@
           <a:p>
             <a:fld id="{B4A2A89E-D439-41FF-B41E-56DAAFB69416}" type="datetimeFigureOut">
               <a:rPr lang="en-IN" smtClean="0"/>
-              <a:t>08-06-2026</a:t>
+              <a:t>10-06-2026</a:t>
             </a:fld>
             <a:endParaRPr lang="en-IN"/>
           </a:p>
@@ -1722,7 +1722,7 @@
           <a:p>
             <a:fld id="{B4A2A89E-D439-41FF-B41E-56DAAFB69416}" type="datetimeFigureOut">
               <a:rPr lang="en-IN" smtClean="0"/>
-              <a:t>08-06-2026</a:t>
+              <a:t>10-06-2026</a:t>
             </a:fld>
             <a:endParaRPr lang="en-IN"/>
           </a:p>
@@ -1990,7 +1990,7 @@
           <a:p>
             <a:fld id="{B4A2A89E-D439-41FF-B41E-56DAAFB69416}" type="datetimeFigureOut">
               <a:rPr lang="en-IN" smtClean="0"/>
-              <a:t>08-06-2026</a:t>
+              <a:t>10-06-2026</a:t>
             </a:fld>
             <a:endParaRPr lang="en-IN"/>
           </a:p>
@@ -2405,7 +2405,7 @@
           <a:p>
             <a:fld id="{B4A2A89E-D439-41FF-B41E-56DAAFB69416}" type="datetimeFigureOut">
               <a:rPr lang="en-IN" smtClean="0"/>
-              <a:t>08-06-2026</a:t>
+              <a:t>10-06-2026</a:t>
             </a:fld>
             <a:endParaRPr lang="en-IN"/>
           </a:p>
@@ -2547,7 +2547,7 @@
           <a:p>
             <a:fld id="{B4A2A89E-D439-41FF-B41E-56DAAFB69416}" type="datetimeFigureOut">
               <a:rPr lang="en-IN" smtClean="0"/>
-              <a:t>08-06-2026</a:t>
+              <a:t>10-06-2026</a:t>
             </a:fld>
             <a:endParaRPr lang="en-IN"/>
           </a:p>
@@ -2660,7 +2660,7 @@
           <a:p>
             <a:fld id="{B4A2A89E-D439-41FF-B41E-56DAAFB69416}" type="datetimeFigureOut">
               <a:rPr lang="en-IN" smtClean="0"/>
-              <a:t>08-06-2026</a:t>
+              <a:t>10-06-2026</a:t>
             </a:fld>
             <a:endParaRPr lang="en-IN"/>
           </a:p>
@@ -2973,7 +2973,7 @@
           <a:p>
             <a:fld id="{B4A2A89E-D439-41FF-B41E-56DAAFB69416}" type="datetimeFigureOut">
               <a:rPr lang="en-IN" smtClean="0"/>
-              <a:t>08-06-2026</a:t>
+              <a:t>10-06-2026</a:t>
             </a:fld>
             <a:endParaRPr lang="en-IN"/>
           </a:p>
@@ -3262,7 +3262,7 @@
           <a:p>
             <a:fld id="{B4A2A89E-D439-41FF-B41E-56DAAFB69416}" type="datetimeFigureOut">
               <a:rPr lang="en-IN" smtClean="0"/>
-              <a:t>08-06-2026</a:t>
+              <a:t>10-06-2026</a:t>
             </a:fld>
             <a:endParaRPr lang="en-IN"/>
           </a:p>
@@ -3505,7 +3505,7 @@
           <a:p>
             <a:fld id="{B4A2A89E-D439-41FF-B41E-56DAAFB69416}" type="datetimeFigureOut">
               <a:rPr lang="en-IN" smtClean="0"/>
-              <a:t>08-06-2026</a:t>
+              <a:t>10-06-2026</a:t>
             </a:fld>
             <a:endParaRPr lang="en-IN"/>
           </a:p>
@@ -6201,99 +6201,6 @@
           </a:p>
         </p:txBody>
       </p:sp>
-      <p:pic>
-        <p:nvPicPr>
-          <p:cNvPr id="12" name="Content Placeholder 11">
-            <a:extLst>
-              <a:ext uri="{FF2B5EF4-FFF2-40B4-BE49-F238E27FC236}">
-                <a16:creationId xmlns:a16="http://schemas.microsoft.com/office/drawing/2014/main" id="{306BE558-5F6A-DA6B-4885-AB191279111E}"/>
-              </a:ext>
-            </a:extLst>
-          </p:cNvPr>
-          <p:cNvPicPr>
-            <a:picLocks noGrp="1" noChangeAspect="1"/>
-          </p:cNvPicPr>
-          <p:nvPr>
-            <p:ph sz="half" idx="1"/>
-          </p:nvPr>
-        </p:nvPicPr>
-        <p:blipFill rotWithShape="1">
-          <a:blip r:embed="rId2">
-            <a:extLst>
-              <a:ext uri="{28A0092B-C50C-407E-A947-70E740481C1C}">
-                <a14:useLocalDpi xmlns:a14="http://schemas.microsoft.com/office/drawing/2010/main" val="0"/>
-              </a:ext>
-            </a:extLst>
-          </a:blip>
-          <a:srcRect l="-1" r="74666"/>
-          <a:stretch>
-            <a:fillRect/>
-          </a:stretch>
-        </p:blipFill>
-        <p:spPr bwMode="auto">
-          <a:xfrm>
-            <a:off x="877300" y="3210128"/>
-            <a:ext cx="4521769" cy="2560722"/>
-          </a:xfrm>
-          <a:prstGeom prst="rect">
-            <a:avLst/>
-          </a:prstGeom>
-          <a:ln>
-            <a:solidFill>
-              <a:schemeClr val="tx1"/>
-            </a:solidFill>
-          </a:ln>
-          <a:extLst>
-            <a:ext uri="{53640926-AAD7-44D8-BBD7-CCE9431645EC}">
-              <a14:shadowObscured xmlns:a14="http://schemas.microsoft.com/office/drawing/2010/main"/>
-            </a:ext>
-          </a:extLst>
-        </p:spPr>
-      </p:pic>
-      <p:pic>
-        <p:nvPicPr>
-          <p:cNvPr id="13" name="Content Placeholder 12">
-            <a:extLst>
-              <a:ext uri="{FF2B5EF4-FFF2-40B4-BE49-F238E27FC236}">
-                <a16:creationId xmlns:a16="http://schemas.microsoft.com/office/drawing/2014/main" id="{04D291C6-8B72-60F8-AFF8-07CD4F6E83BF}"/>
-              </a:ext>
-            </a:extLst>
-          </p:cNvPr>
-          <p:cNvPicPr>
-            <a:picLocks noGrp="1" noChangeAspect="1"/>
-          </p:cNvPicPr>
-          <p:nvPr>
-            <p:ph sz="half" idx="2"/>
-          </p:nvPr>
-        </p:nvPicPr>
-        <p:blipFill>
-          <a:blip r:embed="rId3">
-            <a:extLst>
-              <a:ext uri="{28A0092B-C50C-407E-A947-70E740481C1C}">
-                <a14:useLocalDpi xmlns:a14="http://schemas.microsoft.com/office/drawing/2010/main" val="0"/>
-              </a:ext>
-            </a:extLst>
-          </a:blip>
-          <a:stretch>
-            <a:fillRect/>
-          </a:stretch>
-        </p:blipFill>
-        <p:spPr bwMode="auto">
-          <a:xfrm>
-            <a:off x="6383532" y="3210128"/>
-            <a:ext cx="4521769" cy="2560722"/>
-          </a:xfrm>
-          <a:prstGeom prst="rect">
-            <a:avLst/>
-          </a:prstGeom>
-          <a:noFill/>
-          <a:ln w="9525">
-            <a:solidFill>
-              <a:schemeClr val="tx1"/>
-            </a:solidFill>
-          </a:ln>
-        </p:spPr>
-      </p:pic>
       <p:sp>
         <p:nvSpPr>
           <p:cNvPr id="2" name="TextBox 1">
@@ -6375,10 +6282,62 @@
       </p:sp>
       <p:pic>
         <p:nvPicPr>
-          <p:cNvPr id="5" name="Picture 4">
-            <a:extLst>
-              <a:ext uri="{FF2B5EF4-FFF2-40B4-BE49-F238E27FC236}">
-                <a16:creationId xmlns:a16="http://schemas.microsoft.com/office/drawing/2014/main" id="{768BAFB4-39CD-01CE-42CC-6A89DD89C14E}"/>
+          <p:cNvPr id="1028" name="Picture 4">
+            <a:extLst>
+              <a:ext uri="{FF2B5EF4-FFF2-40B4-BE49-F238E27FC236}">
+                <a16:creationId xmlns:a16="http://schemas.microsoft.com/office/drawing/2014/main" id="{65C86460-17CA-D21D-916C-233CDD2901BF}"/>
+              </a:ext>
+            </a:extLst>
+          </p:cNvPr>
+          <p:cNvPicPr>
+            <a:picLocks noChangeAspect="1" noChangeArrowheads="1"/>
+          </p:cNvPicPr>
+          <p:nvPr/>
+        </p:nvPicPr>
+        <p:blipFill>
+          <a:blip r:embed="rId2">
+            <a:extLst>
+              <a:ext uri="{28A0092B-C50C-407E-A947-70E740481C1C}">
+                <a14:useLocalDpi xmlns:a14="http://schemas.microsoft.com/office/drawing/2010/main" val="0"/>
+              </a:ext>
+            </a:extLst>
+          </a:blip>
+          <a:srcRect/>
+          <a:stretch>
+            <a:fillRect/>
+          </a:stretch>
+        </p:blipFill>
+        <p:spPr bwMode="auto">
+          <a:xfrm>
+            <a:off x="6383531" y="3210128"/>
+            <a:ext cx="4521770" cy="2560722"/>
+          </a:xfrm>
+          <a:prstGeom prst="rect">
+            <a:avLst/>
+          </a:prstGeom>
+          <a:noFill/>
+          <a:ln>
+            <a:solidFill>
+              <a:schemeClr val="tx1"/>
+            </a:solidFill>
+          </a:ln>
+          <a:extLst>
+            <a:ext uri="{909E8E84-426E-40DD-AFC4-6F175D3DCCD1}">
+              <a14:hiddenFill xmlns:a14="http://schemas.microsoft.com/office/drawing/2010/main">
+                <a:solidFill>
+                  <a:srgbClr val="FFFFFF"/>
+                </a:solidFill>
+              </a14:hiddenFill>
+            </a:ext>
+          </a:extLst>
+        </p:spPr>
+      </p:pic>
+      <p:pic>
+        <p:nvPicPr>
+          <p:cNvPr id="17" name="Picture 16">
+            <a:extLst>
+              <a:ext uri="{FF2B5EF4-FFF2-40B4-BE49-F238E27FC236}">
+                <a16:creationId xmlns:a16="http://schemas.microsoft.com/office/drawing/2014/main" id="{74FE68D1-5D09-04CD-262B-9E00A8CAEEA9}"/>
               </a:ext>
             </a:extLst>
           </p:cNvPr>
@@ -6388,15 +6347,16 @@
           <p:nvPr/>
         </p:nvPicPr>
         <p:blipFill>
-          <a:blip r:embed="rId4"/>
+          <a:blip r:embed="rId3"/>
+          <a:srcRect l="8338"/>
           <a:stretch>
             <a:fillRect/>
           </a:stretch>
         </p:blipFill>
         <p:spPr>
           <a:xfrm>
-            <a:off x="6383532" y="1087150"/>
-            <a:ext cx="4521769" cy="1797323"/>
+            <a:off x="877300" y="3205105"/>
+            <a:ext cx="4521769" cy="2560723"/>
           </a:xfrm>
           <a:prstGeom prst="rect">
             <a:avLst/>
@@ -6410,10 +6370,51 @@
       </p:pic>
       <p:pic>
         <p:nvPicPr>
-          <p:cNvPr id="6" name="Picture 5">
-            <a:extLst>
-              <a:ext uri="{FF2B5EF4-FFF2-40B4-BE49-F238E27FC236}">
-                <a16:creationId xmlns:a16="http://schemas.microsoft.com/office/drawing/2014/main" id="{276D57AE-EFF1-A9EB-1303-086AD59495A7}"/>
+          <p:cNvPr id="19" name="Picture 18">
+            <a:extLst>
+              <a:ext uri="{FF2B5EF4-FFF2-40B4-BE49-F238E27FC236}">
+                <a16:creationId xmlns:a16="http://schemas.microsoft.com/office/drawing/2014/main" id="{3B20C278-4D05-F0AD-B12C-0D72A71209B8}"/>
+              </a:ext>
+            </a:extLst>
+          </p:cNvPr>
+          <p:cNvPicPr>
+            <a:picLocks noChangeAspect="1"/>
+          </p:cNvPicPr>
+          <p:nvPr/>
+        </p:nvPicPr>
+        <p:blipFill>
+          <a:blip r:embed="rId4">
+            <a:extLst>
+              <a:ext uri="{28A0092B-C50C-407E-A947-70E740481C1C}">
+                <a14:useLocalDpi xmlns:a14="http://schemas.microsoft.com/office/drawing/2010/main" val="0"/>
+              </a:ext>
+            </a:extLst>
+          </a:blip>
+          <a:stretch>
+            <a:fillRect/>
+          </a:stretch>
+        </p:blipFill>
+        <p:spPr>
+          <a:xfrm>
+            <a:off x="877299" y="1087149"/>
+            <a:ext cx="4521770" cy="1797322"/>
+          </a:xfrm>
+          <a:prstGeom prst="rect">
+            <a:avLst/>
+          </a:prstGeom>
+          <a:ln>
+            <a:solidFill>
+              <a:schemeClr val="tx1"/>
+            </a:solidFill>
+          </a:ln>
+        </p:spPr>
+      </p:pic>
+      <p:pic>
+        <p:nvPicPr>
+          <p:cNvPr id="23" name="Picture 22">
+            <a:extLst>
+              <a:ext uri="{FF2B5EF4-FFF2-40B4-BE49-F238E27FC236}">
+                <a16:creationId xmlns:a16="http://schemas.microsoft.com/office/drawing/2014/main" id="{0DFCD328-82BF-11B6-9B1D-297FDA183F8A}"/>
               </a:ext>
             </a:extLst>
           </p:cNvPr>
@@ -6430,8 +6431,8 @@
         </p:blipFill>
         <p:spPr>
           <a:xfrm>
-            <a:off x="877300" y="1092171"/>
-            <a:ext cx="4521769" cy="1797323"/>
+            <a:off x="6383531" y="1087149"/>
+            <a:ext cx="4521770" cy="1797322"/>
           </a:xfrm>
           <a:prstGeom prst="rect">
             <a:avLst/>

--- a/Project Summary.pptx
+++ b/Project Summary.pptx
@@ -20,8 +20,8 @@
     <p:sldId id="266" r:id="rId8"/>
     <p:sldId id="267" r:id="rId9"/>
     <p:sldId id="271" r:id="rId10"/>
-    <p:sldId id="268" r:id="rId11"/>
-    <p:sldId id="269" r:id="rId12"/>
+    <p:sldId id="269" r:id="rId11"/>
+    <p:sldId id="268" r:id="rId12"/>
     <p:sldId id="270" r:id="rId13"/>
     <p:sldId id="265" r:id="rId14"/>
     <p:sldId id="264" r:id="rId15"/>
@@ -4099,7 +4099,7 @@
           <p:cNvPr id="2" name="Title 1">
             <a:extLst>
               <a:ext uri="{FF2B5EF4-FFF2-40B4-BE49-F238E27FC236}">
-                <a16:creationId xmlns:a16="http://schemas.microsoft.com/office/drawing/2014/main" id="{A11FE445-DAB6-4A34-E1E8-8CBD11C9FF68}"/>
+                <a16:creationId xmlns:a16="http://schemas.microsoft.com/office/drawing/2014/main" id="{1B6DF580-C751-72B7-174D-F52CE01689E1}"/>
               </a:ext>
             </a:extLst>
           </p:cNvPr>
@@ -4112,24 +4112,21 @@
         </p:nvSpPr>
         <p:spPr>
           <a:xfrm>
-            <a:off x="525294" y="365127"/>
-            <a:ext cx="10828506" cy="923331"/>
+            <a:off x="466117" y="-82346"/>
+            <a:ext cx="10838234" cy="666005"/>
           </a:xfrm>
         </p:spPr>
         <p:txBody>
           <a:bodyPr>
-            <a:normAutofit fontScale="90000"/>
+            <a:normAutofit/>
           </a:bodyPr>
           <a:lstStyle/>
           <a:p>
             <a:r>
-              <a:rPr lang="en-IN" sz="2700" b="1" dirty="0"/>
-              <a:t>9. Identify the correlation between product price and the number of times a product has been purchased.  </a:t>
-            </a:r>
-            <a:br>
-              <a:rPr lang="en-IN" dirty="0"/>
-            </a:br>
-            <a:endParaRPr lang="en-IN" dirty="0"/>
+              <a:rPr lang="en-IN" sz="2400" b="1" dirty="0"/>
+              <a:t>9. Calculate the total revenue generated by each seller, and rank them by revenue. </a:t>
+            </a:r>
+            <a:endParaRPr lang="en-IN" sz="2400" dirty="0"/>
           </a:p>
         </p:txBody>
       </p:sp>
@@ -4138,7 +4135,7 @@
           <p:cNvPr id="5" name="Content Placeholder 4">
             <a:extLst>
               <a:ext uri="{FF2B5EF4-FFF2-40B4-BE49-F238E27FC236}">
-                <a16:creationId xmlns:a16="http://schemas.microsoft.com/office/drawing/2014/main" id="{BAFE2ECC-31B7-E0BC-CF00-6B948B31FA06}"/>
+                <a16:creationId xmlns:a16="http://schemas.microsoft.com/office/drawing/2014/main" id="{3E42DC67-BCAD-FA78-277D-AFB498EE72F7}"/>
               </a:ext>
             </a:extLst>
           </p:cNvPr>
@@ -4157,8 +4154,8 @@
         </p:blipFill>
         <p:spPr>
           <a:xfrm>
-            <a:off x="525294" y="3428998"/>
-            <a:ext cx="4445542" cy="2084397"/>
+            <a:off x="651753" y="3203316"/>
+            <a:ext cx="4377447" cy="2247091"/>
           </a:xfrm>
           <a:prstGeom prst="rect">
             <a:avLst/>
@@ -4170,49 +4167,12 @@
           </a:ln>
         </p:spPr>
       </p:pic>
-      <p:pic>
-        <p:nvPicPr>
-          <p:cNvPr id="6" name="Content Placeholder 5">
-            <a:extLst>
-              <a:ext uri="{FF2B5EF4-FFF2-40B4-BE49-F238E27FC236}">
-                <a16:creationId xmlns:a16="http://schemas.microsoft.com/office/drawing/2014/main" id="{5F9AC74D-64DC-81A1-69F0-0F5339E704D8}"/>
-              </a:ext>
-            </a:extLst>
-          </p:cNvPr>
-          <p:cNvPicPr>
-            <a:picLocks noGrp="1"/>
-          </p:cNvPicPr>
-          <p:nvPr>
-            <p:ph sz="half" idx="2"/>
-          </p:nvPr>
-        </p:nvPicPr>
-        <p:blipFill>
-          <a:blip r:embed="rId3"/>
-          <a:stretch>
-            <a:fillRect/>
-          </a:stretch>
-        </p:blipFill>
-        <p:spPr>
-          <a:xfrm>
-            <a:off x="5389123" y="3428998"/>
-            <a:ext cx="5223754" cy="2084397"/>
-          </a:xfrm>
-          <a:prstGeom prst="rect">
-            <a:avLst/>
-          </a:prstGeom>
-          <a:ln>
-            <a:solidFill>
-              <a:schemeClr val="tx1"/>
-            </a:solidFill>
-          </a:ln>
-        </p:spPr>
-      </p:pic>
-      <p:sp>
-        <p:nvSpPr>
-          <p:cNvPr id="7" name="TextBox 6">
-            <a:extLst>
-              <a:ext uri="{FF2B5EF4-FFF2-40B4-BE49-F238E27FC236}">
-                <a16:creationId xmlns:a16="http://schemas.microsoft.com/office/drawing/2014/main" id="{92CA5ACD-C06C-3B6F-2D31-F4EE51558349}"/>
+      <p:sp>
+        <p:nvSpPr>
+          <p:cNvPr id="8" name="TextBox 7">
+            <a:extLst>
+              <a:ext uri="{FF2B5EF4-FFF2-40B4-BE49-F238E27FC236}">
+                <a16:creationId xmlns:a16="http://schemas.microsoft.com/office/drawing/2014/main" id="{CAF92362-51C3-4944-615D-6C0BDA1D3A95}"/>
               </a:ext>
             </a:extLst>
           </p:cNvPr>
@@ -4221,8 +4181,8 @@
         </p:nvSpPr>
         <p:spPr>
           <a:xfrm>
-            <a:off x="525294" y="5724547"/>
-            <a:ext cx="10087582" cy="1015663"/>
+            <a:off x="651753" y="5712051"/>
+            <a:ext cx="10116764" cy="1107996"/>
           </a:xfrm>
           <a:prstGeom prst="rect">
             <a:avLst/>
@@ -4241,24 +4201,16 @@
           <a:lstStyle/>
           <a:p>
             <a:r>
-              <a:rPr lang="en-IN" sz="2000" b="1" dirty="0"/>
+              <a:rPr lang="en-US" sz="2400" b="1" dirty="0"/>
               <a:t>Insight</a:t>
             </a:r>
             <a:r>
-              <a:rPr lang="en-IN" sz="2000" dirty="0"/>
-              <a:t>: There is no connection between an item's price and how often it is bought. </a:t>
-            </a:r>
-            <a:r>
-              <a:rPr lang="en-IN" sz="2000" b="1" dirty="0"/>
-              <a:t> </a:t>
-            </a:r>
-            <a:r>
-              <a:rPr lang="en-IN" sz="2000" dirty="0"/>
-              <a:t>Cheaper items do not automatically sell faster than expensive ones. </a:t>
-            </a:r>
-          </a:p>
-          <a:p>
-            <a:endParaRPr lang="en-IN" sz="2000" dirty="0"/>
+              <a:rPr lang="en-US" sz="2400" dirty="0"/>
+              <a:t>: A few top sellers are bringing in the most money. We need to make sure these  top sellers get good support so they don't leave our platform. </a:t>
+            </a:r>
+          </a:p>
+          <a:p>
+            <a:endParaRPr lang="en-IN" dirty="0"/>
           </a:p>
         </p:txBody>
       </p:sp>
@@ -4267,7 +4219,42 @@
           <p:cNvPr id="4" name="Picture 3">
             <a:extLst>
               <a:ext uri="{FF2B5EF4-FFF2-40B4-BE49-F238E27FC236}">
-                <a16:creationId xmlns:a16="http://schemas.microsoft.com/office/drawing/2014/main" id="{5DCFC966-EF18-1E09-9A4F-2AD9F0001231}"/>
+                <a16:creationId xmlns:a16="http://schemas.microsoft.com/office/drawing/2014/main" id="{3EF7D042-E8A0-4D17-E9B5-FD7AB7B24F2A}"/>
+              </a:ext>
+            </a:extLst>
+          </p:cNvPr>
+          <p:cNvPicPr>
+            <a:picLocks noChangeAspect="1"/>
+          </p:cNvPicPr>
+          <p:nvPr/>
+        </p:nvPicPr>
+        <p:blipFill>
+          <a:blip r:embed="rId3"/>
+          <a:stretch>
+            <a:fillRect/>
+          </a:stretch>
+        </p:blipFill>
+        <p:spPr>
+          <a:xfrm>
+            <a:off x="651753" y="583659"/>
+            <a:ext cx="4377447" cy="2316185"/>
+          </a:xfrm>
+          <a:prstGeom prst="rect">
+            <a:avLst/>
+          </a:prstGeom>
+          <a:ln>
+            <a:solidFill>
+              <a:schemeClr val="tx1"/>
+            </a:solidFill>
+          </a:ln>
+        </p:spPr>
+      </p:pic>
+      <p:pic>
+        <p:nvPicPr>
+          <p:cNvPr id="9" name="Picture 8">
+            <a:extLst>
+              <a:ext uri="{FF2B5EF4-FFF2-40B4-BE49-F238E27FC236}">
+                <a16:creationId xmlns:a16="http://schemas.microsoft.com/office/drawing/2014/main" id="{BE809714-63EF-DBAC-A5DA-9EB7CA88A9A0}"/>
               </a:ext>
             </a:extLst>
           </p:cNvPr>
@@ -4284,8 +4271,8 @@
         </p:blipFill>
         <p:spPr>
           <a:xfrm>
-            <a:off x="525294" y="893566"/>
-            <a:ext cx="4445542" cy="2324280"/>
+            <a:off x="5739319" y="583659"/>
+            <a:ext cx="5029199" cy="2316185"/>
           </a:xfrm>
           <a:prstGeom prst="rect">
             <a:avLst/>
@@ -4299,43 +4286,60 @@
       </p:pic>
       <p:pic>
         <p:nvPicPr>
-          <p:cNvPr id="9" name="Picture 8">
-            <a:extLst>
-              <a:ext uri="{FF2B5EF4-FFF2-40B4-BE49-F238E27FC236}">
-                <a16:creationId xmlns:a16="http://schemas.microsoft.com/office/drawing/2014/main" id="{B1D95995-2751-8651-26B4-4ADDC0862970}"/>
+          <p:cNvPr id="5124" name="Picture 4">
+            <a:extLst>
+              <a:ext uri="{FF2B5EF4-FFF2-40B4-BE49-F238E27FC236}">
+                <a16:creationId xmlns:a16="http://schemas.microsoft.com/office/drawing/2014/main" id="{24E55736-C7AD-0999-FB59-EE7ECC21469F}"/>
               </a:ext>
             </a:extLst>
           </p:cNvPr>
           <p:cNvPicPr>
-            <a:picLocks noChangeAspect="1"/>
+            <a:picLocks noChangeAspect="1" noChangeArrowheads="1"/>
           </p:cNvPicPr>
           <p:nvPr/>
         </p:nvPicPr>
         <p:blipFill>
-          <a:blip r:embed="rId5"/>
+          <a:blip r:embed="rId5">
+            <a:extLst>
+              <a:ext uri="{28A0092B-C50C-407E-A947-70E740481C1C}">
+                <a14:useLocalDpi xmlns:a14="http://schemas.microsoft.com/office/drawing/2010/main" val="0"/>
+              </a:ext>
+            </a:extLst>
+          </a:blip>
+          <a:srcRect/>
           <a:stretch>
             <a:fillRect/>
           </a:stretch>
         </p:blipFill>
-        <p:spPr>
-          <a:xfrm>
-            <a:off x="5389121" y="861010"/>
-            <a:ext cx="5223755" cy="2356836"/>
+        <p:spPr bwMode="auto">
+          <a:xfrm>
+            <a:off x="5739319" y="3161488"/>
+            <a:ext cx="5029198" cy="2288919"/>
           </a:xfrm>
           <a:prstGeom prst="rect">
             <a:avLst/>
           </a:prstGeom>
+          <a:noFill/>
           <a:ln>
             <a:solidFill>
               <a:schemeClr val="tx1"/>
             </a:solidFill>
           </a:ln>
+          <a:extLst>
+            <a:ext uri="{909E8E84-426E-40DD-AFC4-6F175D3DCCD1}">
+              <a14:hiddenFill xmlns:a14="http://schemas.microsoft.com/office/drawing/2010/main">
+                <a:solidFill>
+                  <a:srgbClr val="FFFFFF"/>
+                </a:solidFill>
+              </a14:hiddenFill>
+            </a:ext>
+          </a:extLst>
         </p:spPr>
       </p:pic>
     </p:spTree>
     <p:extLst>
       <p:ext uri="{BB962C8B-B14F-4D97-AF65-F5344CB8AC3E}">
-        <p14:creationId xmlns:p14="http://schemas.microsoft.com/office/powerpoint/2010/main" val="3809039452"/>
+        <p14:creationId xmlns:p14="http://schemas.microsoft.com/office/powerpoint/2010/main" val="3876108132"/>
       </p:ext>
     </p:extLst>
   </p:cSld>
@@ -4367,7 +4371,7 @@
           <p:cNvPr id="2" name="Title 1">
             <a:extLst>
               <a:ext uri="{FF2B5EF4-FFF2-40B4-BE49-F238E27FC236}">
-                <a16:creationId xmlns:a16="http://schemas.microsoft.com/office/drawing/2014/main" id="{1B6DF580-C751-72B7-174D-F52CE01689E1}"/>
+                <a16:creationId xmlns:a16="http://schemas.microsoft.com/office/drawing/2014/main" id="{A11FE445-DAB6-4A34-E1E8-8CBD11C9FF68}"/>
               </a:ext>
             </a:extLst>
           </p:cNvPr>
@@ -4380,21 +4384,24 @@
         </p:nvSpPr>
         <p:spPr>
           <a:xfrm>
-            <a:off x="466117" y="-82346"/>
-            <a:ext cx="10838234" cy="666005"/>
+            <a:off x="525294" y="365127"/>
+            <a:ext cx="10828506" cy="923331"/>
           </a:xfrm>
         </p:spPr>
         <p:txBody>
           <a:bodyPr>
-            <a:normAutofit/>
+            <a:normAutofit fontScale="90000"/>
           </a:bodyPr>
           <a:lstStyle/>
           <a:p>
             <a:r>
-              <a:rPr lang="en-IN" sz="2400" b="1" dirty="0"/>
-              <a:t>10. Calculate the total revenue generated by each seller, and rank them by revenue. </a:t>
-            </a:r>
-            <a:endParaRPr lang="en-IN" sz="2400" dirty="0"/>
+              <a:rPr lang="en-IN" sz="2700" b="1" dirty="0"/>
+              <a:t>10. Identify the correlation between product price and the number of times a product has been purchased.  </a:t>
+            </a:r>
+            <a:br>
+              <a:rPr lang="en-IN" dirty="0"/>
+            </a:br>
+            <a:endParaRPr lang="en-IN" dirty="0"/>
           </a:p>
         </p:txBody>
       </p:sp>
@@ -4403,7 +4410,7 @@
           <p:cNvPr id="5" name="Content Placeholder 4">
             <a:extLst>
               <a:ext uri="{FF2B5EF4-FFF2-40B4-BE49-F238E27FC236}">
-                <a16:creationId xmlns:a16="http://schemas.microsoft.com/office/drawing/2014/main" id="{3E42DC67-BCAD-FA78-277D-AFB498EE72F7}"/>
+                <a16:creationId xmlns:a16="http://schemas.microsoft.com/office/drawing/2014/main" id="{BAFE2ECC-31B7-E0BC-CF00-6B948B31FA06}"/>
               </a:ext>
             </a:extLst>
           </p:cNvPr>
@@ -4422,8 +4429,8 @@
         </p:blipFill>
         <p:spPr>
           <a:xfrm>
-            <a:off x="651753" y="3203316"/>
-            <a:ext cx="4377447" cy="2247091"/>
+            <a:off x="525294" y="3428998"/>
+            <a:ext cx="4445542" cy="2084397"/>
           </a:xfrm>
           <a:prstGeom prst="rect">
             <a:avLst/>
@@ -4435,12 +4442,49 @@
           </a:ln>
         </p:spPr>
       </p:pic>
-      <p:sp>
-        <p:nvSpPr>
-          <p:cNvPr id="8" name="TextBox 7">
-            <a:extLst>
-              <a:ext uri="{FF2B5EF4-FFF2-40B4-BE49-F238E27FC236}">
-                <a16:creationId xmlns:a16="http://schemas.microsoft.com/office/drawing/2014/main" id="{CAF92362-51C3-4944-615D-6C0BDA1D3A95}"/>
+      <p:pic>
+        <p:nvPicPr>
+          <p:cNvPr id="6" name="Content Placeholder 5">
+            <a:extLst>
+              <a:ext uri="{FF2B5EF4-FFF2-40B4-BE49-F238E27FC236}">
+                <a16:creationId xmlns:a16="http://schemas.microsoft.com/office/drawing/2014/main" id="{5F9AC74D-64DC-81A1-69F0-0F5339E704D8}"/>
+              </a:ext>
+            </a:extLst>
+          </p:cNvPr>
+          <p:cNvPicPr>
+            <a:picLocks noGrp="1"/>
+          </p:cNvPicPr>
+          <p:nvPr>
+            <p:ph sz="half" idx="2"/>
+          </p:nvPr>
+        </p:nvPicPr>
+        <p:blipFill>
+          <a:blip r:embed="rId3"/>
+          <a:stretch>
+            <a:fillRect/>
+          </a:stretch>
+        </p:blipFill>
+        <p:spPr>
+          <a:xfrm>
+            <a:off x="5389123" y="3428998"/>
+            <a:ext cx="5223754" cy="2084397"/>
+          </a:xfrm>
+          <a:prstGeom prst="rect">
+            <a:avLst/>
+          </a:prstGeom>
+          <a:ln>
+            <a:solidFill>
+              <a:schemeClr val="tx1"/>
+            </a:solidFill>
+          </a:ln>
+        </p:spPr>
+      </p:pic>
+      <p:sp>
+        <p:nvSpPr>
+          <p:cNvPr id="7" name="TextBox 6">
+            <a:extLst>
+              <a:ext uri="{FF2B5EF4-FFF2-40B4-BE49-F238E27FC236}">
+                <a16:creationId xmlns:a16="http://schemas.microsoft.com/office/drawing/2014/main" id="{92CA5ACD-C06C-3B6F-2D31-F4EE51558349}"/>
               </a:ext>
             </a:extLst>
           </p:cNvPr>
@@ -4449,8 +4493,8 @@
         </p:nvSpPr>
         <p:spPr>
           <a:xfrm>
-            <a:off x="651753" y="5712051"/>
-            <a:ext cx="10116764" cy="1107996"/>
+            <a:off x="525294" y="5724547"/>
+            <a:ext cx="10087582" cy="1015663"/>
           </a:xfrm>
           <a:prstGeom prst="rect">
             <a:avLst/>
@@ -4469,16 +4513,24 @@
           <a:lstStyle/>
           <a:p>
             <a:r>
-              <a:rPr lang="en-US" sz="2400" b="1" dirty="0"/>
+              <a:rPr lang="en-IN" sz="2000" b="1" dirty="0"/>
               <a:t>Insight</a:t>
             </a:r>
             <a:r>
-              <a:rPr lang="en-US" sz="2400" dirty="0"/>
-              <a:t>: A few top sellers are bringing in the most money. We need to make sure these  top sellers get good support so they don't leave our platform. </a:t>
-            </a:r>
-          </a:p>
-          <a:p>
-            <a:endParaRPr lang="en-IN" dirty="0"/>
+              <a:rPr lang="en-IN" sz="2000" dirty="0"/>
+              <a:t>: There is no connection between an item's price and how often it is bought. </a:t>
+            </a:r>
+            <a:r>
+              <a:rPr lang="en-IN" sz="2000" b="1" dirty="0"/>
+              <a:t> </a:t>
+            </a:r>
+            <a:r>
+              <a:rPr lang="en-IN" sz="2000" dirty="0"/>
+              <a:t>Cheaper items do not automatically sell faster than expensive ones. </a:t>
+            </a:r>
+          </a:p>
+          <a:p>
+            <a:endParaRPr lang="en-IN" sz="2000" dirty="0"/>
           </a:p>
         </p:txBody>
       </p:sp>
@@ -4487,42 +4539,7 @@
           <p:cNvPr id="4" name="Picture 3">
             <a:extLst>
               <a:ext uri="{FF2B5EF4-FFF2-40B4-BE49-F238E27FC236}">
-                <a16:creationId xmlns:a16="http://schemas.microsoft.com/office/drawing/2014/main" id="{3EF7D042-E8A0-4D17-E9B5-FD7AB7B24F2A}"/>
-              </a:ext>
-            </a:extLst>
-          </p:cNvPr>
-          <p:cNvPicPr>
-            <a:picLocks noChangeAspect="1"/>
-          </p:cNvPicPr>
-          <p:nvPr/>
-        </p:nvPicPr>
-        <p:blipFill>
-          <a:blip r:embed="rId3"/>
-          <a:stretch>
-            <a:fillRect/>
-          </a:stretch>
-        </p:blipFill>
-        <p:spPr>
-          <a:xfrm>
-            <a:off x="651753" y="583659"/>
-            <a:ext cx="4377447" cy="2316185"/>
-          </a:xfrm>
-          <a:prstGeom prst="rect">
-            <a:avLst/>
-          </a:prstGeom>
-          <a:ln>
-            <a:solidFill>
-              <a:schemeClr val="tx1"/>
-            </a:solidFill>
-          </a:ln>
-        </p:spPr>
-      </p:pic>
-      <p:pic>
-        <p:nvPicPr>
-          <p:cNvPr id="9" name="Picture 8">
-            <a:extLst>
-              <a:ext uri="{FF2B5EF4-FFF2-40B4-BE49-F238E27FC236}">
-                <a16:creationId xmlns:a16="http://schemas.microsoft.com/office/drawing/2014/main" id="{BE809714-63EF-DBAC-A5DA-9EB7CA88A9A0}"/>
+                <a16:creationId xmlns:a16="http://schemas.microsoft.com/office/drawing/2014/main" id="{5DCFC966-EF18-1E09-9A4F-2AD9F0001231}"/>
               </a:ext>
             </a:extLst>
           </p:cNvPr>
@@ -4539,8 +4556,8 @@
         </p:blipFill>
         <p:spPr>
           <a:xfrm>
-            <a:off x="5739319" y="583659"/>
-            <a:ext cx="5029199" cy="2316185"/>
+            <a:off x="525294" y="893566"/>
+            <a:ext cx="4445542" cy="2324280"/>
           </a:xfrm>
           <a:prstGeom prst="rect">
             <a:avLst/>
@@ -4554,60 +4571,43 @@
       </p:pic>
       <p:pic>
         <p:nvPicPr>
-          <p:cNvPr id="5124" name="Picture 4">
-            <a:extLst>
-              <a:ext uri="{FF2B5EF4-FFF2-40B4-BE49-F238E27FC236}">
-                <a16:creationId xmlns:a16="http://schemas.microsoft.com/office/drawing/2014/main" id="{24E55736-C7AD-0999-FB59-EE7ECC21469F}"/>
+          <p:cNvPr id="9" name="Picture 8">
+            <a:extLst>
+              <a:ext uri="{FF2B5EF4-FFF2-40B4-BE49-F238E27FC236}">
+                <a16:creationId xmlns:a16="http://schemas.microsoft.com/office/drawing/2014/main" id="{B1D95995-2751-8651-26B4-4ADDC0862970}"/>
               </a:ext>
             </a:extLst>
           </p:cNvPr>
           <p:cNvPicPr>
-            <a:picLocks noChangeAspect="1" noChangeArrowheads="1"/>
+            <a:picLocks noChangeAspect="1"/>
           </p:cNvPicPr>
           <p:nvPr/>
         </p:nvPicPr>
         <p:blipFill>
-          <a:blip r:embed="rId5">
-            <a:extLst>
-              <a:ext uri="{28A0092B-C50C-407E-A947-70E740481C1C}">
-                <a14:useLocalDpi xmlns:a14="http://schemas.microsoft.com/office/drawing/2010/main" val="0"/>
-              </a:ext>
-            </a:extLst>
-          </a:blip>
-          <a:srcRect/>
+          <a:blip r:embed="rId5"/>
           <a:stretch>
             <a:fillRect/>
           </a:stretch>
         </p:blipFill>
-        <p:spPr bwMode="auto">
-          <a:xfrm>
-            <a:off x="5739319" y="3161488"/>
-            <a:ext cx="5029198" cy="2288919"/>
+        <p:spPr>
+          <a:xfrm>
+            <a:off x="5389121" y="861010"/>
+            <a:ext cx="5223755" cy="2356836"/>
           </a:xfrm>
           <a:prstGeom prst="rect">
             <a:avLst/>
           </a:prstGeom>
-          <a:noFill/>
           <a:ln>
             <a:solidFill>
               <a:schemeClr val="tx1"/>
             </a:solidFill>
           </a:ln>
-          <a:extLst>
-            <a:ext uri="{909E8E84-426E-40DD-AFC4-6F175D3DCCD1}">
-              <a14:hiddenFill xmlns:a14="http://schemas.microsoft.com/office/drawing/2010/main">
-                <a:solidFill>
-                  <a:srgbClr val="FFFFFF"/>
-                </a:solidFill>
-              </a14:hiddenFill>
-            </a:ext>
-          </a:extLst>
         </p:spPr>
       </p:pic>
     </p:spTree>
     <p:extLst>
       <p:ext uri="{BB962C8B-B14F-4D97-AF65-F5344CB8AC3E}">
-        <p14:creationId xmlns:p14="http://schemas.microsoft.com/office/powerpoint/2010/main" val="3876108132"/>
+        <p14:creationId xmlns:p14="http://schemas.microsoft.com/office/powerpoint/2010/main" val="3809039452"/>
       </p:ext>
     </p:extLst>
   </p:cSld>
@@ -4673,43 +4673,6 @@
           </a:p>
         </p:txBody>
       </p:sp>
-      <p:pic>
-        <p:nvPicPr>
-          <p:cNvPr id="5" name="Content Placeholder 4">
-            <a:extLst>
-              <a:ext uri="{FF2B5EF4-FFF2-40B4-BE49-F238E27FC236}">
-                <a16:creationId xmlns:a16="http://schemas.microsoft.com/office/drawing/2014/main" id="{33908E02-061D-D801-3E1B-48ECDC8124C1}"/>
-              </a:ext>
-            </a:extLst>
-          </p:cNvPr>
-          <p:cNvPicPr>
-            <a:picLocks noGrp="1"/>
-          </p:cNvPicPr>
-          <p:nvPr>
-            <p:ph sz="half" idx="1"/>
-          </p:nvPr>
-        </p:nvPicPr>
-        <p:blipFill>
-          <a:blip r:embed="rId2"/>
-          <a:stretch>
-            <a:fillRect/>
-          </a:stretch>
-        </p:blipFill>
-        <p:spPr>
-          <a:xfrm>
-            <a:off x="561474" y="3659030"/>
-            <a:ext cx="4516364" cy="1788459"/>
-          </a:xfrm>
-          <a:prstGeom prst="rect">
-            <a:avLst/>
-          </a:prstGeom>
-          <a:ln>
-            <a:solidFill>
-              <a:schemeClr val="tx1"/>
-            </a:solidFill>
-          </a:ln>
-        </p:spPr>
-      </p:pic>
       <p:sp>
         <p:nvSpPr>
           <p:cNvPr id="7" name="TextBox 6">
@@ -4759,10 +4722,45 @@
       </p:sp>
       <p:pic>
         <p:nvPicPr>
-          <p:cNvPr id="4" name="Picture 3">
-            <a:extLst>
-              <a:ext uri="{FF2B5EF4-FFF2-40B4-BE49-F238E27FC236}">
-                <a16:creationId xmlns:a16="http://schemas.microsoft.com/office/drawing/2014/main" id="{28559849-DDD3-FC53-6E33-EE6784442AF4}"/>
+          <p:cNvPr id="6" name="Picture 5">
+            <a:extLst>
+              <a:ext uri="{FF2B5EF4-FFF2-40B4-BE49-F238E27FC236}">
+                <a16:creationId xmlns:a16="http://schemas.microsoft.com/office/drawing/2014/main" id="{DDED568E-F72E-6E46-0B97-11837999B3A5}"/>
+              </a:ext>
+            </a:extLst>
+          </p:cNvPr>
+          <p:cNvPicPr>
+            <a:picLocks noChangeAspect="1"/>
+          </p:cNvPicPr>
+          <p:nvPr/>
+        </p:nvPicPr>
+        <p:blipFill>
+          <a:blip r:embed="rId2"/>
+          <a:stretch>
+            <a:fillRect/>
+          </a:stretch>
+        </p:blipFill>
+        <p:spPr>
+          <a:xfrm>
+            <a:off x="5684100" y="3282289"/>
+            <a:ext cx="4907700" cy="2165200"/>
+          </a:xfrm>
+          <a:prstGeom prst="rect">
+            <a:avLst/>
+          </a:prstGeom>
+          <a:ln>
+            <a:solidFill>
+              <a:schemeClr val="tx1"/>
+            </a:solidFill>
+          </a:ln>
+        </p:spPr>
+      </p:pic>
+      <p:pic>
+        <p:nvPicPr>
+          <p:cNvPr id="10" name="Picture 9">
+            <a:extLst>
+              <a:ext uri="{FF2B5EF4-FFF2-40B4-BE49-F238E27FC236}">
+                <a16:creationId xmlns:a16="http://schemas.microsoft.com/office/drawing/2014/main" id="{6CEB0FF1-6C02-CCB2-C720-644D91AF4A61}"/>
               </a:ext>
             </a:extLst>
           </p:cNvPr>
@@ -4779,8 +4777,8 @@
         </p:blipFill>
         <p:spPr>
           <a:xfrm>
-            <a:off x="561474" y="827833"/>
-            <a:ext cx="4516364" cy="2601167"/>
+            <a:off x="5684100" y="827833"/>
+            <a:ext cx="4907700" cy="2263336"/>
           </a:xfrm>
           <a:prstGeom prst="rect">
             <a:avLst/>
@@ -4794,10 +4792,10 @@
       </p:pic>
       <p:pic>
         <p:nvPicPr>
-          <p:cNvPr id="9" name="Picture 8">
-            <a:extLst>
-              <a:ext uri="{FF2B5EF4-FFF2-40B4-BE49-F238E27FC236}">
-                <a16:creationId xmlns:a16="http://schemas.microsoft.com/office/drawing/2014/main" id="{2D092308-43F5-EFF9-A552-3B7936CE9D2C}"/>
+          <p:cNvPr id="16" name="Picture 15">
+            <a:extLst>
+              <a:ext uri="{FF2B5EF4-FFF2-40B4-BE49-F238E27FC236}">
+                <a16:creationId xmlns:a16="http://schemas.microsoft.com/office/drawing/2014/main" id="{F6BD7237-2080-63E0-81ED-9BB71A7A83E6}"/>
               </a:ext>
             </a:extLst>
           </p:cNvPr>
@@ -4814,8 +4812,8 @@
         </p:blipFill>
         <p:spPr>
           <a:xfrm>
-            <a:off x="5758775" y="827833"/>
-            <a:ext cx="5176478" cy="2601167"/>
+            <a:off x="561473" y="3385633"/>
+            <a:ext cx="4516365" cy="2061855"/>
           </a:xfrm>
           <a:prstGeom prst="rect">
             <a:avLst/>
@@ -4829,54 +4827,37 @@
       </p:pic>
       <p:pic>
         <p:nvPicPr>
-          <p:cNvPr id="6146" name="Picture 2">
-            <a:extLst>
-              <a:ext uri="{FF2B5EF4-FFF2-40B4-BE49-F238E27FC236}">
-                <a16:creationId xmlns:a16="http://schemas.microsoft.com/office/drawing/2014/main" id="{27C640A8-5C5D-5070-9005-79BD27CC115A}"/>
+          <p:cNvPr id="18" name="Picture 17">
+            <a:extLst>
+              <a:ext uri="{FF2B5EF4-FFF2-40B4-BE49-F238E27FC236}">
+                <a16:creationId xmlns:a16="http://schemas.microsoft.com/office/drawing/2014/main" id="{2F6C6197-37C4-8978-3E66-09A0DAA3154A}"/>
               </a:ext>
             </a:extLst>
           </p:cNvPr>
           <p:cNvPicPr>
-            <a:picLocks noChangeAspect="1" noChangeArrowheads="1"/>
+            <a:picLocks noChangeAspect="1"/>
           </p:cNvPicPr>
           <p:nvPr/>
         </p:nvPicPr>
         <p:blipFill>
-          <a:blip r:embed="rId5">
-            <a:extLst>
-              <a:ext uri="{28A0092B-C50C-407E-A947-70E740481C1C}">
-                <a14:useLocalDpi xmlns:a14="http://schemas.microsoft.com/office/drawing/2010/main" val="0"/>
-              </a:ext>
-            </a:extLst>
-          </a:blip>
-          <a:srcRect/>
+          <a:blip r:embed="rId5"/>
           <a:stretch>
             <a:fillRect/>
           </a:stretch>
         </p:blipFill>
-        <p:spPr bwMode="auto">
-          <a:xfrm>
-            <a:off x="5758775" y="3549014"/>
-            <a:ext cx="5176477" cy="1898475"/>
+        <p:spPr>
+          <a:xfrm>
+            <a:off x="561473" y="827833"/>
+            <a:ext cx="4516365" cy="2263336"/>
           </a:xfrm>
           <a:prstGeom prst="rect">
             <a:avLst/>
           </a:prstGeom>
-          <a:noFill/>
           <a:ln>
             <a:solidFill>
               <a:schemeClr val="tx1"/>
             </a:solidFill>
           </a:ln>
-          <a:extLst>
-            <a:ext uri="{909E8E84-426E-40DD-AFC4-6F175D3DCCD1}">
-              <a14:hiddenFill xmlns:a14="http://schemas.microsoft.com/office/drawing/2010/main">
-                <a:solidFill>
-                  <a:srgbClr val="FFFFFF"/>
-                </a:solidFill>
-              </a14:hiddenFill>
-            </a:ext>
-          </a:extLst>
         </p:spPr>
       </p:pic>
     </p:spTree>
@@ -4998,30 +4979,29 @@
       </p:sp>
       <p:pic>
         <p:nvPicPr>
-          <p:cNvPr id="6" name="Content Placeholder 5">
-            <a:extLst>
-              <a:ext uri="{FF2B5EF4-FFF2-40B4-BE49-F238E27FC236}">
-                <a16:creationId xmlns:a16="http://schemas.microsoft.com/office/drawing/2014/main" id="{1B9AFA80-BA51-C124-D103-D85BDE547ED6}"/>
+          <p:cNvPr id="8" name="Picture 7">
+            <a:extLst>
+              <a:ext uri="{FF2B5EF4-FFF2-40B4-BE49-F238E27FC236}">
+                <a16:creationId xmlns:a16="http://schemas.microsoft.com/office/drawing/2014/main" id="{31B7F64A-D96A-E09C-AF24-15B977A8F3E9}"/>
               </a:ext>
             </a:extLst>
           </p:cNvPr>
           <p:cNvPicPr>
-            <a:picLocks noGrp="1"/>
+            <a:picLocks noChangeAspect="1"/>
           </p:cNvPicPr>
-          <p:nvPr>
-            <p:ph sz="half" idx="1"/>
-          </p:nvPr>
+          <p:nvPr/>
         </p:nvPicPr>
         <p:blipFill>
           <a:blip r:embed="rId2"/>
+          <a:srcRect b="31346"/>
           <a:stretch>
             <a:fillRect/>
           </a:stretch>
         </p:blipFill>
         <p:spPr>
           <a:xfrm>
-            <a:off x="695826" y="3389363"/>
-            <a:ext cx="4663573" cy="2194314"/>
+            <a:off x="5829299" y="3389363"/>
+            <a:ext cx="5238750" cy="2194313"/>
           </a:xfrm>
           <a:prstGeom prst="rect">
             <a:avLst/>
@@ -5035,14 +5015,16 @@
       </p:pic>
       <p:pic>
         <p:nvPicPr>
-          <p:cNvPr id="7" name="Picture 6">
-            <a:extLst>
-              <a:ext uri="{FF2B5EF4-FFF2-40B4-BE49-F238E27FC236}">
-                <a16:creationId xmlns:a16="http://schemas.microsoft.com/office/drawing/2014/main" id="{696C4FB3-69CF-C4A7-605F-D13A425485A7}"/>
-              </a:ext>
-            </a:extLst>
-          </p:cNvPr>
-          <p:cNvPicPr/>
+          <p:cNvPr id="15" name="Picture 14">
+            <a:extLst>
+              <a:ext uri="{FF2B5EF4-FFF2-40B4-BE49-F238E27FC236}">
+                <a16:creationId xmlns:a16="http://schemas.microsoft.com/office/drawing/2014/main" id="{A7C608CA-9389-8095-235D-9DC360C04813}"/>
+              </a:ext>
+            </a:extLst>
+          </p:cNvPr>
+          <p:cNvPicPr>
+            <a:picLocks noChangeAspect="1"/>
+          </p:cNvPicPr>
           <p:nvPr/>
         </p:nvPicPr>
         <p:blipFill>
@@ -5053,13 +5035,13 @@
         </p:blipFill>
         <p:spPr>
           <a:xfrm>
-            <a:off x="5897814" y="3389363"/>
-            <a:ext cx="4917575" cy="2194314"/>
+            <a:off x="5829298" y="457200"/>
+            <a:ext cx="5238751" cy="2682365"/>
           </a:xfrm>
           <a:prstGeom prst="rect">
             <a:avLst/>
           </a:prstGeom>
-          <a:ln w="9525">
+          <a:ln>
             <a:solidFill>
               <a:schemeClr val="tx1"/>
             </a:solidFill>
@@ -5068,10 +5050,10 @@
       </p:pic>
       <p:pic>
         <p:nvPicPr>
-          <p:cNvPr id="4" name="Picture 3">
-            <a:extLst>
-              <a:ext uri="{FF2B5EF4-FFF2-40B4-BE49-F238E27FC236}">
-                <a16:creationId xmlns:a16="http://schemas.microsoft.com/office/drawing/2014/main" id="{D891A26E-BF39-74A0-66A5-87125EED3F4A}"/>
+          <p:cNvPr id="17" name="Picture 16">
+            <a:extLst>
+              <a:ext uri="{FF2B5EF4-FFF2-40B4-BE49-F238E27FC236}">
+                <a16:creationId xmlns:a16="http://schemas.microsoft.com/office/drawing/2014/main" id="{190E5359-8F37-FDEB-FC65-F60480A58586}"/>
               </a:ext>
             </a:extLst>
           </p:cNvPr>
@@ -5088,8 +5070,8 @@
         </p:blipFill>
         <p:spPr>
           <a:xfrm>
-            <a:off x="695828" y="528162"/>
-            <a:ext cx="4663574" cy="2611403"/>
+            <a:off x="695826" y="457200"/>
+            <a:ext cx="4663574" cy="2682365"/>
           </a:xfrm>
           <a:prstGeom prst="rect">
             <a:avLst/>
@@ -5103,10 +5085,10 @@
       </p:pic>
       <p:pic>
         <p:nvPicPr>
-          <p:cNvPr id="9" name="Picture 8">
-            <a:extLst>
-              <a:ext uri="{FF2B5EF4-FFF2-40B4-BE49-F238E27FC236}">
-                <a16:creationId xmlns:a16="http://schemas.microsoft.com/office/drawing/2014/main" id="{E5B49488-642B-3A98-22B9-3272CF79BC55}"/>
+          <p:cNvPr id="19" name="Picture 18">
+            <a:extLst>
+              <a:ext uri="{FF2B5EF4-FFF2-40B4-BE49-F238E27FC236}">
+                <a16:creationId xmlns:a16="http://schemas.microsoft.com/office/drawing/2014/main" id="{62D8D8AF-93AB-26F9-5EFD-8644F783E9F3}"/>
               </a:ext>
             </a:extLst>
           </p:cNvPr>
@@ -5123,8 +5105,8 @@
         </p:blipFill>
         <p:spPr>
           <a:xfrm>
-            <a:off x="5897814" y="528162"/>
-            <a:ext cx="4851791" cy="2611403"/>
+            <a:off x="695827" y="3429001"/>
+            <a:ext cx="4663574" cy="2154676"/>
           </a:xfrm>
           <a:prstGeom prst="rect">
             <a:avLst/>
@@ -5492,38 +5474,22 @@
           </a:p>
         </p:txBody>
       </p:sp>
-      <p:pic>
-        <p:nvPicPr>
-          <p:cNvPr id="6" name="Content Placeholder 5">
-            <a:extLst>
-              <a:ext uri="{FF2B5EF4-FFF2-40B4-BE49-F238E27FC236}">
-                <a16:creationId xmlns:a16="http://schemas.microsoft.com/office/drawing/2014/main" id="{0DD94AF6-4058-D7E1-A743-9C9926109EC1}"/>
-              </a:ext>
-            </a:extLst>
-          </p:cNvPr>
-          <p:cNvPicPr>
-            <a:picLocks noGrp="1" noChangeAspect="1"/>
-          </p:cNvPicPr>
-          <p:nvPr>
-            <p:ph sz="half" idx="2"/>
-          </p:nvPr>
-        </p:nvPicPr>
-        <p:blipFill>
-          <a:blip r:embed="rId2">
-            <a:extLst>
-              <a:ext uri="{28A0092B-C50C-407E-A947-70E740481C1C}">
-                <a14:useLocalDpi xmlns:a14="http://schemas.microsoft.com/office/drawing/2010/main" val="0"/>
-              </a:ext>
-            </a:extLst>
-          </a:blip>
-          <a:stretch>
-            <a:fillRect/>
-          </a:stretch>
-        </p:blipFill>
-        <p:spPr bwMode="auto">
-          <a:xfrm>
-            <a:off x="5603132" y="3185701"/>
-            <a:ext cx="4620639" cy="2378519"/>
+      <p:sp>
+        <p:nvSpPr>
+          <p:cNvPr id="3" name="TextBox 2">
+            <a:extLst>
+              <a:ext uri="{FF2B5EF4-FFF2-40B4-BE49-F238E27FC236}">
+                <a16:creationId xmlns:a16="http://schemas.microsoft.com/office/drawing/2014/main" id="{0C33B320-E9C0-D6E3-F70C-D4FD6CBB9E35}"/>
+              </a:ext>
+            </a:extLst>
+          </p:cNvPr>
+          <p:cNvSpPr txBox="1"/>
+          <p:nvPr/>
+        </p:nvSpPr>
+        <p:spPr>
+          <a:xfrm>
+            <a:off x="583570" y="6024091"/>
+            <a:ext cx="9640200" cy="707886"/>
           </a:xfrm>
           <a:prstGeom prst="rect">
             <a:avLst/>
@@ -5535,23 +5501,125 @@
             </a:solidFill>
           </a:ln>
         </p:spPr>
+        <p:txBody>
+          <a:bodyPr wrap="square" rtlCol="0">
+            <a:spAutoFit/>
+          </a:bodyPr>
+          <a:lstStyle/>
+          <a:p>
+            <a:r>
+              <a:rPr lang="en-IN" sz="2000" b="1" dirty="0"/>
+              <a:t>Insight</a:t>
+            </a:r>
+            <a:r>
+              <a:rPr lang="en-IN" sz="2000" dirty="0"/>
+              <a:t>: A few key customers spend a huge amount of money. We should offer them VIP discounts to thank them and keep them loyal. </a:t>
+            </a:r>
+          </a:p>
+        </p:txBody>
+      </p:sp>
+      <p:pic>
+        <p:nvPicPr>
+          <p:cNvPr id="5" name="Picture 4">
+            <a:extLst>
+              <a:ext uri="{FF2B5EF4-FFF2-40B4-BE49-F238E27FC236}">
+                <a16:creationId xmlns:a16="http://schemas.microsoft.com/office/drawing/2014/main" id="{13CFCC16-874D-9577-106F-78FF6F296EB8}"/>
+              </a:ext>
+            </a:extLst>
+          </p:cNvPr>
+          <p:cNvPicPr>
+            <a:picLocks noChangeAspect="1"/>
+          </p:cNvPicPr>
+          <p:nvPr/>
+        </p:nvPicPr>
+        <p:blipFill>
+          <a:blip r:embed="rId2"/>
+          <a:srcRect r="9788"/>
+          <a:stretch>
+            <a:fillRect/>
+          </a:stretch>
+        </p:blipFill>
+        <p:spPr>
+          <a:xfrm>
+            <a:off x="579841" y="3185700"/>
+            <a:ext cx="4087409" cy="2378519"/>
+          </a:xfrm>
+          <a:prstGeom prst="rect">
+            <a:avLst/>
+          </a:prstGeom>
+          <a:ln>
+            <a:solidFill>
+              <a:schemeClr val="tx1"/>
+            </a:solidFill>
+          </a:ln>
+        </p:spPr>
       </p:pic>
-      <p:sp>
-        <p:nvSpPr>
-          <p:cNvPr id="3" name="TextBox 2">
-            <a:extLst>
-              <a:ext uri="{FF2B5EF4-FFF2-40B4-BE49-F238E27FC236}">
-                <a16:creationId xmlns:a16="http://schemas.microsoft.com/office/drawing/2014/main" id="{0C33B320-E9C0-D6E3-F70C-D4FD6CBB9E35}"/>
-              </a:ext>
-            </a:extLst>
-          </p:cNvPr>
-          <p:cNvSpPr txBox="1"/>
+      <p:pic>
+        <p:nvPicPr>
+          <p:cNvPr id="10" name="Picture 9">
+            <a:extLst>
+              <a:ext uri="{FF2B5EF4-FFF2-40B4-BE49-F238E27FC236}">
+                <a16:creationId xmlns:a16="http://schemas.microsoft.com/office/drawing/2014/main" id="{F3C65F7D-CA78-3A59-71F1-D6FBC3C2EC78}"/>
+              </a:ext>
+            </a:extLst>
+          </p:cNvPr>
+          <p:cNvPicPr>
+            <a:picLocks noChangeAspect="1"/>
+          </p:cNvPicPr>
           <p:nvPr/>
-        </p:nvSpPr>
-        <p:spPr>
-          <a:xfrm>
-            <a:off x="583570" y="6024091"/>
-            <a:ext cx="9640200" cy="707886"/>
+        </p:nvPicPr>
+        <p:blipFill>
+          <a:blip r:embed="rId3"/>
+          <a:stretch>
+            <a:fillRect/>
+          </a:stretch>
+        </p:blipFill>
+        <p:spPr>
+          <a:xfrm>
+            <a:off x="579840" y="611306"/>
+            <a:ext cx="4087410" cy="2171681"/>
+          </a:xfrm>
+          <a:prstGeom prst="rect">
+            <a:avLst/>
+          </a:prstGeom>
+          <a:ln>
+            <a:solidFill>
+              <a:schemeClr val="tx1"/>
+            </a:solidFill>
+          </a:ln>
+        </p:spPr>
+      </p:pic>
+      <p:pic>
+        <p:nvPicPr>
+          <p:cNvPr id="2050" name="Picture 2">
+            <a:extLst>
+              <a:ext uri="{FF2B5EF4-FFF2-40B4-BE49-F238E27FC236}">
+                <a16:creationId xmlns:a16="http://schemas.microsoft.com/office/drawing/2014/main" id="{0243D4F9-982B-600B-21A4-27679E196FB8}"/>
+              </a:ext>
+            </a:extLst>
+          </p:cNvPr>
+          <p:cNvPicPr>
+            <a:picLocks noChangeAspect="1" noChangeArrowheads="1"/>
+          </p:cNvPicPr>
+          <p:nvPr/>
+        </p:nvPicPr>
+        <p:blipFill>
+          <a:blip r:embed="rId4">
+            <a:extLst>
+              <a:ext uri="{28A0092B-C50C-407E-A947-70E740481C1C}">
+                <a14:useLocalDpi xmlns:a14="http://schemas.microsoft.com/office/drawing/2010/main" val="0"/>
+              </a:ext>
+            </a:extLst>
+          </a:blip>
+          <a:srcRect/>
+          <a:stretch>
+            <a:fillRect/>
+          </a:stretch>
+        </p:blipFill>
+        <p:spPr bwMode="auto">
+          <a:xfrm>
+            <a:off x="5603132" y="3185700"/>
+            <a:ext cx="4620638" cy="2378519"/>
           </a:xfrm>
           <a:prstGeom prst="rect">
             <a:avLst/>
@@ -5563,29 +5631,13 @@
             </a:solidFill>
           </a:ln>
         </p:spPr>
-        <p:txBody>
-          <a:bodyPr wrap="square" rtlCol="0">
-            <a:spAutoFit/>
-          </a:bodyPr>
-          <a:lstStyle/>
-          <a:p>
-            <a:r>
-              <a:rPr lang="en-IN" sz="2000" b="1" dirty="0"/>
-              <a:t>Insight</a:t>
-            </a:r>
-            <a:r>
-              <a:rPr lang="en-IN" sz="2000" dirty="0"/>
-              <a:t>: A few key customers spend a huge amount of money. We should offer them VIP discounts to thank them and keep them loyal. </a:t>
-            </a:r>
-          </a:p>
-        </p:txBody>
-      </p:sp>
+      </p:pic>
       <p:pic>
         <p:nvPicPr>
-          <p:cNvPr id="7" name="Picture 6">
-            <a:extLst>
-              <a:ext uri="{FF2B5EF4-FFF2-40B4-BE49-F238E27FC236}">
-                <a16:creationId xmlns:a16="http://schemas.microsoft.com/office/drawing/2014/main" id="{8B44D7B0-BD36-24EE-9F9C-00B69FB5BA7A}"/>
+          <p:cNvPr id="15" name="Picture 14">
+            <a:extLst>
+              <a:ext uri="{FF2B5EF4-FFF2-40B4-BE49-F238E27FC236}">
+                <a16:creationId xmlns:a16="http://schemas.microsoft.com/office/drawing/2014/main" id="{A83F6F0A-8C4C-B973-0A84-D6B5E8C82107}"/>
               </a:ext>
             </a:extLst>
           </p:cNvPr>
@@ -5595,103 +5647,15 @@
           <p:nvPr/>
         </p:nvPicPr>
         <p:blipFill>
-          <a:blip r:embed="rId3">
-            <a:extLst>
-              <a:ext uri="{28A0092B-C50C-407E-A947-70E740481C1C}">
-                <a14:useLocalDpi xmlns:a14="http://schemas.microsoft.com/office/drawing/2010/main" val="0"/>
-              </a:ext>
-            </a:extLst>
-          </a:blip>
+          <a:blip r:embed="rId5"/>
           <a:stretch>
             <a:fillRect/>
           </a:stretch>
         </p:blipFill>
         <p:spPr>
           <a:xfrm>
-            <a:off x="579841" y="611307"/>
-            <a:ext cx="3910610" cy="2171681"/>
-          </a:xfrm>
-          <a:prstGeom prst="rect">
-            <a:avLst/>
-          </a:prstGeom>
-          <a:ln>
-            <a:solidFill>
-              <a:schemeClr val="tx1"/>
-            </a:solidFill>
-          </a:ln>
-        </p:spPr>
-      </p:pic>
-      <p:pic>
-        <p:nvPicPr>
-          <p:cNvPr id="9" name="Picture 8">
-            <a:extLst>
-              <a:ext uri="{FF2B5EF4-FFF2-40B4-BE49-F238E27FC236}">
-                <a16:creationId xmlns:a16="http://schemas.microsoft.com/office/drawing/2014/main" id="{BA9D1F44-D247-5ACA-1176-9A3906617BFD}"/>
-              </a:ext>
-            </a:extLst>
-          </p:cNvPr>
-          <p:cNvPicPr>
-            <a:picLocks noChangeAspect="1"/>
-          </p:cNvPicPr>
-          <p:nvPr/>
-        </p:nvPicPr>
-        <p:blipFill>
-          <a:blip r:embed="rId4">
-            <a:extLst>
-              <a:ext uri="{28A0092B-C50C-407E-A947-70E740481C1C}">
-                <a14:useLocalDpi xmlns:a14="http://schemas.microsoft.com/office/drawing/2010/main" val="0"/>
-              </a:ext>
-            </a:extLst>
-          </a:blip>
-          <a:stretch>
-            <a:fillRect/>
-          </a:stretch>
-        </p:blipFill>
-        <p:spPr>
-          <a:xfrm>
             <a:off x="5603132" y="611306"/>
             <a:ext cx="4620638" cy="2171681"/>
-          </a:xfrm>
-          <a:prstGeom prst="rect">
-            <a:avLst/>
-          </a:prstGeom>
-          <a:ln>
-            <a:solidFill>
-              <a:schemeClr val="tx1"/>
-            </a:solidFill>
-          </a:ln>
-        </p:spPr>
-      </p:pic>
-      <p:pic>
-        <p:nvPicPr>
-          <p:cNvPr id="11" name="Picture 10">
-            <a:extLst>
-              <a:ext uri="{FF2B5EF4-FFF2-40B4-BE49-F238E27FC236}">
-                <a16:creationId xmlns:a16="http://schemas.microsoft.com/office/drawing/2014/main" id="{DB5F32CA-AA42-FFFF-F1DE-E5F6EB2BE114}"/>
-              </a:ext>
-            </a:extLst>
-          </p:cNvPr>
-          <p:cNvPicPr>
-            <a:picLocks noChangeAspect="1"/>
-          </p:cNvPicPr>
-          <p:nvPr/>
-        </p:nvPicPr>
-        <p:blipFill>
-          <a:blip r:embed="rId5">
-            <a:extLst>
-              <a:ext uri="{28A0092B-C50C-407E-A947-70E740481C1C}">
-                <a14:useLocalDpi xmlns:a14="http://schemas.microsoft.com/office/drawing/2010/main" val="0"/>
-              </a:ext>
-            </a:extLst>
-          </a:blip>
-          <a:stretch>
-            <a:fillRect/>
-          </a:stretch>
-        </p:blipFill>
-        <p:spPr>
-          <a:xfrm>
-            <a:off x="579841" y="3185700"/>
-            <a:ext cx="3910610" cy="2378519"/>
           </a:xfrm>
           <a:prstGeom prst="rect">
             <a:avLst/>

--- a/Project Summary.pptx
+++ b/Project Summary.pptx
@@ -25,8 +25,8 @@
     <p:sldId id="270" r:id="rId13"/>
     <p:sldId id="265" r:id="rId14"/>
     <p:sldId id="264" r:id="rId15"/>
-    <p:sldId id="262" r:id="rId16"/>
-    <p:sldId id="263" r:id="rId17"/>
+    <p:sldId id="263" r:id="rId16"/>
+    <p:sldId id="262" r:id="rId17"/>
     <p:sldId id="272" r:id="rId18"/>
   </p:sldIdLst>
   <p:sldSz cx="12192000" cy="6858000"/>
@@ -4130,43 +4130,6 @@
           </a:p>
         </p:txBody>
       </p:sp>
-      <p:pic>
-        <p:nvPicPr>
-          <p:cNvPr id="5" name="Content Placeholder 4">
-            <a:extLst>
-              <a:ext uri="{FF2B5EF4-FFF2-40B4-BE49-F238E27FC236}">
-                <a16:creationId xmlns:a16="http://schemas.microsoft.com/office/drawing/2014/main" id="{3E42DC67-BCAD-FA78-277D-AFB498EE72F7}"/>
-              </a:ext>
-            </a:extLst>
-          </p:cNvPr>
-          <p:cNvPicPr>
-            <a:picLocks noGrp="1"/>
-          </p:cNvPicPr>
-          <p:nvPr>
-            <p:ph sz="half" idx="1"/>
-          </p:nvPr>
-        </p:nvPicPr>
-        <p:blipFill>
-          <a:blip r:embed="rId2"/>
-          <a:stretch>
-            <a:fillRect/>
-          </a:stretch>
-        </p:blipFill>
-        <p:spPr>
-          <a:xfrm>
-            <a:off x="651753" y="3203316"/>
-            <a:ext cx="4377447" cy="2247091"/>
-          </a:xfrm>
-          <a:prstGeom prst="rect">
-            <a:avLst/>
-          </a:prstGeom>
-          <a:ln>
-            <a:solidFill>
-              <a:schemeClr val="tx1"/>
-            </a:solidFill>
-          </a:ln>
-        </p:spPr>
-      </p:pic>
       <p:sp>
         <p:nvSpPr>
           <p:cNvPr id="8" name="TextBox 7">
@@ -4220,6 +4183,41 @@
             <a:extLst>
               <a:ext uri="{FF2B5EF4-FFF2-40B4-BE49-F238E27FC236}">
                 <a16:creationId xmlns:a16="http://schemas.microsoft.com/office/drawing/2014/main" id="{3EF7D042-E8A0-4D17-E9B5-FD7AB7B24F2A}"/>
+              </a:ext>
+            </a:extLst>
+          </p:cNvPr>
+          <p:cNvPicPr>
+            <a:picLocks noChangeAspect="1"/>
+          </p:cNvPicPr>
+          <p:nvPr/>
+        </p:nvPicPr>
+        <p:blipFill>
+          <a:blip r:embed="rId2"/>
+          <a:stretch>
+            <a:fillRect/>
+          </a:stretch>
+        </p:blipFill>
+        <p:spPr>
+          <a:xfrm>
+            <a:off x="651753" y="583659"/>
+            <a:ext cx="4377447" cy="2316185"/>
+          </a:xfrm>
+          <a:prstGeom prst="rect">
+            <a:avLst/>
+          </a:prstGeom>
+          <a:ln>
+            <a:solidFill>
+              <a:schemeClr val="tx1"/>
+            </a:solidFill>
+          </a:ln>
+        </p:spPr>
+      </p:pic>
+      <p:pic>
+        <p:nvPicPr>
+          <p:cNvPr id="10" name="Picture 9">
+            <a:extLst>
+              <a:ext uri="{FF2B5EF4-FFF2-40B4-BE49-F238E27FC236}">
+                <a16:creationId xmlns:a16="http://schemas.microsoft.com/office/drawing/2014/main" id="{CA86B055-8229-8915-D387-0653068B612E}"/>
               </a:ext>
             </a:extLst>
           </p:cNvPr>
@@ -4236,8 +4234,8 @@
         </p:blipFill>
         <p:spPr>
           <a:xfrm>
-            <a:off x="651753" y="583659"/>
-            <a:ext cx="4377447" cy="2316185"/>
+            <a:off x="651753" y="3161488"/>
+            <a:ext cx="4377447" cy="2316184"/>
           </a:xfrm>
           <a:prstGeom prst="rect">
             <a:avLst/>
@@ -4251,10 +4249,10 @@
       </p:pic>
       <p:pic>
         <p:nvPicPr>
-          <p:cNvPr id="9" name="Picture 8">
-            <a:extLst>
-              <a:ext uri="{FF2B5EF4-FFF2-40B4-BE49-F238E27FC236}">
-                <a16:creationId xmlns:a16="http://schemas.microsoft.com/office/drawing/2014/main" id="{BE809714-63EF-DBAC-A5DA-9EB7CA88A9A0}"/>
+          <p:cNvPr id="11" name="Picture 10">
+            <a:extLst>
+              <a:ext uri="{FF2B5EF4-FFF2-40B4-BE49-F238E27FC236}">
+                <a16:creationId xmlns:a16="http://schemas.microsoft.com/office/drawing/2014/main" id="{35AE3951-6BDF-854F-A84E-55E5D84CF9DE}"/>
               </a:ext>
             </a:extLst>
           </p:cNvPr>
@@ -4264,15 +4262,22 @@
           <p:nvPr/>
         </p:nvPicPr>
         <p:blipFill>
-          <a:blip r:embed="rId4"/>
+          <a:blip r:embed="rId4">
+            <a:extLst>
+              <a:ext uri="{28A0092B-C50C-407E-A947-70E740481C1C}">
+                <a14:useLocalDpi xmlns:a14="http://schemas.microsoft.com/office/drawing/2010/main" val="0"/>
+              </a:ext>
+            </a:extLst>
+          </a:blip>
+          <a:srcRect t="37536" r="14853"/>
           <a:stretch>
             <a:fillRect/>
           </a:stretch>
         </p:blipFill>
         <p:spPr>
           <a:xfrm>
-            <a:off x="5739319" y="583659"/>
-            <a:ext cx="5029199" cy="2316185"/>
+            <a:off x="5636308" y="3084953"/>
+            <a:ext cx="5132207" cy="2392719"/>
           </a:xfrm>
           <a:prstGeom prst="rect">
             <a:avLst/>
@@ -4286,54 +4291,44 @@
       </p:pic>
       <p:pic>
         <p:nvPicPr>
-          <p:cNvPr id="5124" name="Picture 4">
-            <a:extLst>
-              <a:ext uri="{FF2B5EF4-FFF2-40B4-BE49-F238E27FC236}">
-                <a16:creationId xmlns:a16="http://schemas.microsoft.com/office/drawing/2014/main" id="{24E55736-C7AD-0999-FB59-EE7ECC21469F}"/>
+          <p:cNvPr id="12" name="Picture 11">
+            <a:extLst>
+              <a:ext uri="{FF2B5EF4-FFF2-40B4-BE49-F238E27FC236}">
+                <a16:creationId xmlns:a16="http://schemas.microsoft.com/office/drawing/2014/main" id="{26708A7C-4E18-0ACD-144F-0B96138A2C90}"/>
               </a:ext>
             </a:extLst>
           </p:cNvPr>
           <p:cNvPicPr>
-            <a:picLocks noChangeAspect="1" noChangeArrowheads="1"/>
+            <a:picLocks noChangeAspect="1"/>
           </p:cNvPicPr>
           <p:nvPr/>
         </p:nvPicPr>
         <p:blipFill>
-          <a:blip r:embed="rId5">
+          <a:blip r:embed="rId4">
             <a:extLst>
               <a:ext uri="{28A0092B-C50C-407E-A947-70E740481C1C}">
                 <a14:useLocalDpi xmlns:a14="http://schemas.microsoft.com/office/drawing/2010/main" val="0"/>
               </a:ext>
             </a:extLst>
           </a:blip>
-          <a:srcRect/>
+          <a:srcRect b="62673"/>
           <a:stretch>
             <a:fillRect/>
           </a:stretch>
         </p:blipFill>
-        <p:spPr bwMode="auto">
-          <a:xfrm>
-            <a:off x="5739319" y="3161488"/>
-            <a:ext cx="5029198" cy="2288919"/>
+        <p:spPr>
+          <a:xfrm>
+            <a:off x="5636309" y="583658"/>
+            <a:ext cx="5132208" cy="2266915"/>
           </a:xfrm>
           <a:prstGeom prst="rect">
             <a:avLst/>
           </a:prstGeom>
-          <a:noFill/>
           <a:ln>
             <a:solidFill>
               <a:schemeClr val="tx1"/>
             </a:solidFill>
           </a:ln>
-          <a:extLst>
-            <a:ext uri="{909E8E84-426E-40DD-AFC4-6F175D3DCCD1}">
-              <a14:hiddenFill xmlns:a14="http://schemas.microsoft.com/office/drawing/2010/main">
-                <a:solidFill>
-                  <a:srgbClr val="FFFFFF"/>
-                </a:solidFill>
-              </a14:hiddenFill>
-            </a:ext>
-          </a:extLst>
         </p:spPr>
       </p:pic>
     </p:spTree>
@@ -4688,7 +4683,7 @@
         <p:spPr>
           <a:xfrm>
             <a:off x="561474" y="5638609"/>
-            <a:ext cx="10373778" cy="984885"/>
+            <a:ext cx="10030326" cy="707886"/>
           </a:xfrm>
           <a:prstGeom prst="rect">
             <a:avLst/>
@@ -4714,9 +4709,6 @@
               <a:rPr lang="en-IN" sz="2000" dirty="0"/>
               <a:t> : Tracking the moving average helps us see the normal spending habits of customers, ignoring sudden spikes from random large orders. </a:t>
             </a:r>
-          </a:p>
-          <a:p>
-            <a:endParaRPr lang="en-IN" dirty="0"/>
           </a:p>
         </p:txBody>
       </p:sp>
@@ -4993,7 +4985,7 @@
         </p:nvPicPr>
         <p:blipFill>
           <a:blip r:embed="rId2"/>
-          <a:srcRect b="31346"/>
+          <a:srcRect l="13454" b="31346"/>
           <a:stretch>
             <a:fillRect/>
           </a:stretch>
@@ -5440,7 +5432,7 @@
           <p:cNvPr id="2" name="Title 1">
             <a:extLst>
               <a:ext uri="{FF2B5EF4-FFF2-40B4-BE49-F238E27FC236}">
-                <a16:creationId xmlns:a16="http://schemas.microsoft.com/office/drawing/2014/main" id="{67823DF1-DAC9-5102-6053-DDBA0AA33157}"/>
+                <a16:creationId xmlns:a16="http://schemas.microsoft.com/office/drawing/2014/main" id="{97DA8234-C348-425E-4DBB-D94207FABB27}"/>
               </a:ext>
             </a:extLst>
           </p:cNvPr>
@@ -5453,33 +5445,30 @@
         </p:nvSpPr>
         <p:spPr>
           <a:xfrm>
-            <a:off x="583570" y="99447"/>
-            <a:ext cx="10748866" cy="601134"/>
+            <a:off x="535021" y="1"/>
+            <a:ext cx="10822994" cy="731412"/>
           </a:xfrm>
         </p:spPr>
         <p:txBody>
           <a:bodyPr>
-            <a:normAutofit fontScale="90000"/>
+            <a:normAutofit/>
           </a:bodyPr>
           <a:lstStyle/>
           <a:p>
             <a:r>
-              <a:rPr lang="en-US" sz="2700" b="1" dirty="0"/>
-              <a:t>14.  Identify the top 3 customers who spent the most money in each year.</a:t>
-            </a:r>
-            <a:br>
-              <a:rPr lang="en-IN" sz="2400" dirty="0"/>
-            </a:br>
-            <a:endParaRPr lang="en-IN" sz="2400" dirty="0"/>
-          </a:p>
-        </p:txBody>
-      </p:sp>
-      <p:sp>
-        <p:nvSpPr>
-          <p:cNvPr id="3" name="TextBox 2">
-            <a:extLst>
-              <a:ext uri="{FF2B5EF4-FFF2-40B4-BE49-F238E27FC236}">
-                <a16:creationId xmlns:a16="http://schemas.microsoft.com/office/drawing/2014/main" id="{0C33B320-E9C0-D6E3-F70C-D4FD6CBB9E35}"/>
+              <a:rPr lang="en-US" sz="2000" b="1" dirty="0"/>
+              <a:t>14. Calculate the retention rate of customers, defined as the percentage of customers who make another purchase within 6 months of their first purchase.</a:t>
+            </a:r>
+            <a:endParaRPr lang="en-IN" sz="2000" dirty="0"/>
+          </a:p>
+        </p:txBody>
+      </p:sp>
+      <p:sp>
+        <p:nvSpPr>
+          <p:cNvPr id="7" name="TextBox 6">
+            <a:extLst>
+              <a:ext uri="{FF2B5EF4-FFF2-40B4-BE49-F238E27FC236}">
+                <a16:creationId xmlns:a16="http://schemas.microsoft.com/office/drawing/2014/main" id="{D834AC10-CC42-9CF4-DDF1-B0EFB4748F8E}"/>
               </a:ext>
             </a:extLst>
           </p:cNvPr>
@@ -5488,8 +5477,8 @@
         </p:nvSpPr>
         <p:spPr>
           <a:xfrm>
-            <a:off x="583570" y="6024091"/>
-            <a:ext cx="9640200" cy="707886"/>
+            <a:off x="677331" y="5534304"/>
+            <a:ext cx="10680683" cy="1015663"/>
           </a:xfrm>
           <a:prstGeom prst="rect">
             <a:avLst/>
@@ -5508,22 +5497,22 @@
           <a:lstStyle/>
           <a:p>
             <a:r>
-              <a:rPr lang="en-IN" sz="2000" b="1" dirty="0"/>
+              <a:rPr lang="en-US" sz="2000" b="1" dirty="0"/>
               <a:t>Insight</a:t>
             </a:r>
             <a:r>
               <a:rPr lang="en-IN" sz="2000" dirty="0"/>
-              <a:t>: A few key customers spend a huge amount of money. We should offer them VIP discounts to thank them and keep them loyal. </a:t>
+              <a:t>:Our analysis shows a 0% retention rate, indicating that first-time buyers are not returning to make a second purchase within 6 months. We need to implement targeted email marketing and loyalty programs to incentivize repeat shopping and improve customer loyalty. 	</a:t>
             </a:r>
           </a:p>
         </p:txBody>
       </p:sp>
       <p:pic>
         <p:nvPicPr>
-          <p:cNvPr id="5" name="Picture 4">
-            <a:extLst>
-              <a:ext uri="{FF2B5EF4-FFF2-40B4-BE49-F238E27FC236}">
-                <a16:creationId xmlns:a16="http://schemas.microsoft.com/office/drawing/2014/main" id="{13CFCC16-874D-9577-106F-78FF6F296EB8}"/>
+          <p:cNvPr id="11" name="Picture 10">
+            <a:extLst>
+              <a:ext uri="{FF2B5EF4-FFF2-40B4-BE49-F238E27FC236}">
+                <a16:creationId xmlns:a16="http://schemas.microsoft.com/office/drawing/2014/main" id="{DE0E9672-5FFE-0758-4A44-CCD5D0535E9A}"/>
               </a:ext>
             </a:extLst>
           </p:cNvPr>
@@ -5534,15 +5523,15 @@
         </p:nvPicPr>
         <p:blipFill>
           <a:blip r:embed="rId2"/>
-          <a:srcRect r="9788"/>
+          <a:srcRect b="19497"/>
           <a:stretch>
             <a:fillRect/>
           </a:stretch>
         </p:blipFill>
         <p:spPr>
           <a:xfrm>
-            <a:off x="579841" y="3185700"/>
-            <a:ext cx="4087409" cy="2378519"/>
+            <a:off x="677332" y="4042246"/>
+            <a:ext cx="4857705" cy="1148880"/>
           </a:xfrm>
           <a:prstGeom prst="rect">
             <a:avLst/>
@@ -5556,10 +5545,10 @@
       </p:pic>
       <p:pic>
         <p:nvPicPr>
-          <p:cNvPr id="10" name="Picture 9">
-            <a:extLst>
-              <a:ext uri="{FF2B5EF4-FFF2-40B4-BE49-F238E27FC236}">
-                <a16:creationId xmlns:a16="http://schemas.microsoft.com/office/drawing/2014/main" id="{F3C65F7D-CA78-3A59-71F1-D6FBC3C2EC78}"/>
+          <p:cNvPr id="13" name="Picture 12">
+            <a:extLst>
+              <a:ext uri="{FF2B5EF4-FFF2-40B4-BE49-F238E27FC236}">
+                <a16:creationId xmlns:a16="http://schemas.microsoft.com/office/drawing/2014/main" id="{B9D175D5-4660-6F8E-595C-416E2AC550F9}"/>
               </a:ext>
             </a:extLst>
           </p:cNvPr>
@@ -5576,8 +5565,8 @@
         </p:blipFill>
         <p:spPr>
           <a:xfrm>
-            <a:off x="579840" y="611306"/>
-            <a:ext cx="4087410" cy="2171681"/>
+            <a:off x="677333" y="731412"/>
+            <a:ext cx="4857705" cy="2830938"/>
           </a:xfrm>
           <a:prstGeom prst="rect">
             <a:avLst/>
@@ -5591,53 +5580,10 @@
       </p:pic>
       <p:pic>
         <p:nvPicPr>
-          <p:cNvPr id="2050" name="Picture 2">
-            <a:extLst>
-              <a:ext uri="{FF2B5EF4-FFF2-40B4-BE49-F238E27FC236}">
-                <a16:creationId xmlns:a16="http://schemas.microsoft.com/office/drawing/2014/main" id="{0243D4F9-982B-600B-21A4-27679E196FB8}"/>
-              </a:ext>
-            </a:extLst>
-          </p:cNvPr>
-          <p:cNvPicPr>
-            <a:picLocks noChangeAspect="1" noChangeArrowheads="1"/>
-          </p:cNvPicPr>
-          <p:nvPr/>
-        </p:nvPicPr>
-        <p:blipFill>
-          <a:blip r:embed="rId4">
-            <a:extLst>
-              <a:ext uri="{28A0092B-C50C-407E-A947-70E740481C1C}">
-                <a14:useLocalDpi xmlns:a14="http://schemas.microsoft.com/office/drawing/2010/main" val="0"/>
-              </a:ext>
-            </a:extLst>
-          </a:blip>
-          <a:srcRect/>
-          <a:stretch>
-            <a:fillRect/>
-          </a:stretch>
-        </p:blipFill>
-        <p:spPr bwMode="auto">
-          <a:xfrm>
-            <a:off x="5603132" y="3185700"/>
-            <a:ext cx="4620638" cy="2378519"/>
-          </a:xfrm>
-          <a:prstGeom prst="rect">
-            <a:avLst/>
-          </a:prstGeom>
-          <a:noFill/>
-          <a:ln>
-            <a:solidFill>
-              <a:schemeClr val="tx1"/>
-            </a:solidFill>
-          </a:ln>
-        </p:spPr>
-      </p:pic>
-      <p:pic>
-        <p:nvPicPr>
-          <p:cNvPr id="15" name="Picture 14">
-            <a:extLst>
-              <a:ext uri="{FF2B5EF4-FFF2-40B4-BE49-F238E27FC236}">
-                <a16:creationId xmlns:a16="http://schemas.microsoft.com/office/drawing/2014/main" id="{A83F6F0A-8C4C-B973-0A84-D6B5E8C82107}"/>
+          <p:cNvPr id="20" name="Picture 19">
+            <a:extLst>
+              <a:ext uri="{FF2B5EF4-FFF2-40B4-BE49-F238E27FC236}">
+                <a16:creationId xmlns:a16="http://schemas.microsoft.com/office/drawing/2014/main" id="{6A6591C7-A015-2A2E-D0BC-CDC62DF82017}"/>
               </a:ext>
             </a:extLst>
           </p:cNvPr>
@@ -5647,15 +5593,16 @@
           <p:nvPr/>
         </p:nvPicPr>
         <p:blipFill>
-          <a:blip r:embed="rId5"/>
+          <a:blip r:embed="rId4"/>
+          <a:srcRect b="20940"/>
           <a:stretch>
             <a:fillRect/>
           </a:stretch>
         </p:blipFill>
         <p:spPr>
           <a:xfrm>
-            <a:off x="5603132" y="611306"/>
-            <a:ext cx="4620638" cy="2171681"/>
+            <a:off x="5881811" y="731412"/>
+            <a:ext cx="5476204" cy="2830938"/>
           </a:xfrm>
           <a:prstGeom prst="rect">
             <a:avLst/>
@@ -5667,10 +5614,46 @@
           </a:ln>
         </p:spPr>
       </p:pic>
+      <p:pic>
+        <p:nvPicPr>
+          <p:cNvPr id="21" name="Picture 20">
+            <a:extLst>
+              <a:ext uri="{FF2B5EF4-FFF2-40B4-BE49-F238E27FC236}">
+                <a16:creationId xmlns:a16="http://schemas.microsoft.com/office/drawing/2014/main" id="{0B696506-9208-24FA-89CD-6A70365F6B4C}"/>
+              </a:ext>
+            </a:extLst>
+          </p:cNvPr>
+          <p:cNvPicPr>
+            <a:picLocks noChangeAspect="1"/>
+          </p:cNvPicPr>
+          <p:nvPr/>
+        </p:nvPicPr>
+        <p:blipFill>
+          <a:blip r:embed="rId4"/>
+          <a:srcRect t="76483" r="17909"/>
+          <a:stretch>
+            <a:fillRect/>
+          </a:stretch>
+        </p:blipFill>
+        <p:spPr>
+          <a:xfrm>
+            <a:off x="5881811" y="4042246"/>
+            <a:ext cx="5476204" cy="1148880"/>
+          </a:xfrm>
+          <a:prstGeom prst="rect">
+            <a:avLst/>
+          </a:prstGeom>
+          <a:ln>
+            <a:solidFill>
+              <a:schemeClr val="tx1"/>
+            </a:solidFill>
+          </a:ln>
+        </p:spPr>
+      </p:pic>
     </p:spTree>
     <p:extLst>
       <p:ext uri="{BB962C8B-B14F-4D97-AF65-F5344CB8AC3E}">
-        <p14:creationId xmlns:p14="http://schemas.microsoft.com/office/powerpoint/2010/main" val="774738043"/>
+        <p14:creationId xmlns:p14="http://schemas.microsoft.com/office/powerpoint/2010/main" val="2987574774"/>
       </p:ext>
     </p:extLst>
   </p:cSld>
@@ -5702,7 +5685,7 @@
           <p:cNvPr id="2" name="Title 1">
             <a:extLst>
               <a:ext uri="{FF2B5EF4-FFF2-40B4-BE49-F238E27FC236}">
-                <a16:creationId xmlns:a16="http://schemas.microsoft.com/office/drawing/2014/main" id="{97DA8234-C348-425E-4DBB-D94207FABB27}"/>
+                <a16:creationId xmlns:a16="http://schemas.microsoft.com/office/drawing/2014/main" id="{67823DF1-DAC9-5102-6053-DDBA0AA33157}"/>
               </a:ext>
             </a:extLst>
           </p:cNvPr>
@@ -5715,101 +5698,43 @@
         </p:nvSpPr>
         <p:spPr>
           <a:xfrm>
-            <a:off x="535021" y="1"/>
-            <a:ext cx="10822994" cy="731412"/>
+            <a:off x="583570" y="99447"/>
+            <a:ext cx="10748866" cy="601134"/>
           </a:xfrm>
         </p:spPr>
         <p:txBody>
           <a:bodyPr>
-            <a:normAutofit/>
+            <a:normAutofit fontScale="90000"/>
           </a:bodyPr>
           <a:lstStyle/>
           <a:p>
             <a:r>
-              <a:rPr lang="en-US" sz="2000" b="1" dirty="0"/>
-              <a:t>15. Calculate the retention rate of customers, defined as the percentage of customers who make another purchase within 6 months of their first purchase.</a:t>
-            </a:r>
-            <a:endParaRPr lang="en-IN" sz="2000" dirty="0"/>
-          </a:p>
-        </p:txBody>
-      </p:sp>
-      <p:pic>
-        <p:nvPicPr>
-          <p:cNvPr id="5" name="Content Placeholder 4">
-            <a:extLst>
-              <a:ext uri="{FF2B5EF4-FFF2-40B4-BE49-F238E27FC236}">
-                <a16:creationId xmlns:a16="http://schemas.microsoft.com/office/drawing/2014/main" id="{A6E62393-6BC6-2448-78AE-AAD3CC072354}"/>
-              </a:ext>
-            </a:extLst>
-          </p:cNvPr>
-          <p:cNvPicPr>
-            <a:picLocks noGrp="1" noChangeAspect="1"/>
-          </p:cNvPicPr>
-          <p:nvPr>
-            <p:ph sz="half" idx="1"/>
-          </p:nvPr>
-        </p:nvPicPr>
-        <p:blipFill>
-          <a:blip r:embed="rId2">
-            <a:extLst>
-              <a:ext uri="{28A0092B-C50C-407E-A947-70E740481C1C}">
-                <a14:useLocalDpi xmlns:a14="http://schemas.microsoft.com/office/drawing/2010/main" val="0"/>
-              </a:ext>
-            </a:extLst>
-          </a:blip>
-          <a:srcRect r="31620"/>
-          <a:stretch>
-            <a:fillRect/>
-          </a:stretch>
-        </p:blipFill>
-        <p:spPr>
-          <a:xfrm>
-            <a:off x="677333" y="3429000"/>
-            <a:ext cx="4429688" cy="2407596"/>
-          </a:xfrm>
-          <a:prstGeom prst="rect">
-            <a:avLst/>
-          </a:prstGeom>
-          <a:ln>
-            <a:solidFill>
-              <a:schemeClr val="tx1"/>
-            </a:solidFill>
-          </a:ln>
-        </p:spPr>
-      </p:pic>
-      <p:pic>
-        <p:nvPicPr>
-          <p:cNvPr id="6" name="Content Placeholder 5">
-            <a:extLst>
-              <a:ext uri="{FF2B5EF4-FFF2-40B4-BE49-F238E27FC236}">
-                <a16:creationId xmlns:a16="http://schemas.microsoft.com/office/drawing/2014/main" id="{5C2EFB94-3117-8FCE-4D31-9A07EB13635C}"/>
-              </a:ext>
-            </a:extLst>
-          </p:cNvPr>
-          <p:cNvPicPr>
-            <a:picLocks noGrp="1" noChangeAspect="1"/>
-          </p:cNvPicPr>
-          <p:nvPr>
-            <p:ph sz="half" idx="2"/>
-          </p:nvPr>
-        </p:nvPicPr>
-        <p:blipFill>
-          <a:blip r:embed="rId3" cstate="print">
-            <a:extLst>
-              <a:ext uri="{28A0092B-C50C-407E-A947-70E740481C1C}">
-                <a14:useLocalDpi xmlns:a14="http://schemas.microsoft.com/office/drawing/2010/main" val="0"/>
-              </a:ext>
-            </a:extLst>
-          </a:blip>
-          <a:srcRect/>
-          <a:stretch>
-            <a:fillRect/>
-          </a:stretch>
-        </p:blipFill>
-        <p:spPr bwMode="auto">
-          <a:xfrm>
-            <a:off x="6096000" y="3429000"/>
-            <a:ext cx="4990289" cy="2407596"/>
+              <a:rPr lang="en-US" sz="2700" b="1" dirty="0"/>
+              <a:t>15.  Identify the top 3 customers who spent the most money in each year.</a:t>
+            </a:r>
+            <a:br>
+              <a:rPr lang="en-IN" sz="2400" dirty="0"/>
+            </a:br>
+            <a:endParaRPr lang="en-IN" sz="2400" dirty="0"/>
+          </a:p>
+        </p:txBody>
+      </p:sp>
+      <p:sp>
+        <p:nvSpPr>
+          <p:cNvPr id="3" name="TextBox 2">
+            <a:extLst>
+              <a:ext uri="{FF2B5EF4-FFF2-40B4-BE49-F238E27FC236}">
+                <a16:creationId xmlns:a16="http://schemas.microsoft.com/office/drawing/2014/main" id="{0C33B320-E9C0-D6E3-F70C-D4FD6CBB9E35}"/>
+              </a:ext>
+            </a:extLst>
+          </p:cNvPr>
+          <p:cNvSpPr txBox="1"/>
+          <p:nvPr/>
+        </p:nvSpPr>
+        <p:spPr>
+          <a:xfrm>
+            <a:off x="583570" y="6024091"/>
+            <a:ext cx="9922504" cy="707886"/>
           </a:xfrm>
           <a:prstGeom prst="rect">
             <a:avLst/>
@@ -5821,34 +5746,6 @@
             </a:solidFill>
           </a:ln>
         </p:spPr>
-      </p:pic>
-      <p:sp>
-        <p:nvSpPr>
-          <p:cNvPr id="7" name="TextBox 6">
-            <a:extLst>
-              <a:ext uri="{FF2B5EF4-FFF2-40B4-BE49-F238E27FC236}">
-                <a16:creationId xmlns:a16="http://schemas.microsoft.com/office/drawing/2014/main" id="{D834AC10-CC42-9CF4-DDF1-B0EFB4748F8E}"/>
-              </a:ext>
-            </a:extLst>
-          </p:cNvPr>
-          <p:cNvSpPr txBox="1"/>
-          <p:nvPr/>
-        </p:nvSpPr>
-        <p:spPr>
-          <a:xfrm>
-            <a:off x="677333" y="6058179"/>
-            <a:ext cx="10408956" cy="707886"/>
-          </a:xfrm>
-          <a:prstGeom prst="rect">
-            <a:avLst/>
-          </a:prstGeom>
-          <a:noFill/>
-          <a:ln>
-            <a:solidFill>
-              <a:schemeClr val="tx1"/>
-            </a:solidFill>
-          </a:ln>
-        </p:spPr>
         <p:txBody>
           <a:bodyPr wrap="square" rtlCol="0">
             <a:spAutoFit/>
@@ -5856,22 +5753,22 @@
           <a:lstStyle/>
           <a:p>
             <a:r>
-              <a:rPr lang="en-US" sz="2000" b="1" dirty="0"/>
+              <a:rPr lang="en-IN" sz="2000" b="1" dirty="0"/>
               <a:t>Insight</a:t>
             </a:r>
             <a:r>
               <a:rPr lang="en-IN" sz="2000" dirty="0"/>
-              <a:t>: Only 2.3% of customers come back to buy again within 6 months. This is very low. We need to send better emails and offers to get people to shop a second time. 	</a:t>
+              <a:t>: A few key customers spend a huge amount of money. We should offer them VIP discounts to thank them and keep them loyal. </a:t>
             </a:r>
           </a:p>
         </p:txBody>
       </p:sp>
       <p:pic>
         <p:nvPicPr>
-          <p:cNvPr id="4" name="Picture 3">
-            <a:extLst>
-              <a:ext uri="{FF2B5EF4-FFF2-40B4-BE49-F238E27FC236}">
-                <a16:creationId xmlns:a16="http://schemas.microsoft.com/office/drawing/2014/main" id="{B2CB1041-FB6D-671B-D9E5-6AE0B12ADB53}"/>
+          <p:cNvPr id="6" name="Picture 5">
+            <a:extLst>
+              <a:ext uri="{FF2B5EF4-FFF2-40B4-BE49-F238E27FC236}">
+                <a16:creationId xmlns:a16="http://schemas.microsoft.com/office/drawing/2014/main" id="{0BFDB475-6C48-1BF7-0AEB-9FFA2B9FCE1E}"/>
               </a:ext>
             </a:extLst>
           </p:cNvPr>
@@ -5881,15 +5778,21 @@
           <p:nvPr/>
         </p:nvPicPr>
         <p:blipFill>
-          <a:blip r:embed="rId4"/>
+          <a:blip r:embed="rId2">
+            <a:extLst>
+              <a:ext uri="{28A0092B-C50C-407E-A947-70E740481C1C}">
+                <a14:useLocalDpi xmlns:a14="http://schemas.microsoft.com/office/drawing/2010/main" val="0"/>
+              </a:ext>
+            </a:extLst>
+          </a:blip>
           <a:stretch>
             <a:fillRect/>
           </a:stretch>
         </p:blipFill>
         <p:spPr>
           <a:xfrm>
-            <a:off x="677333" y="731413"/>
-            <a:ext cx="4429688" cy="2486781"/>
+            <a:off x="579840" y="611306"/>
+            <a:ext cx="4206455" cy="2171681"/>
           </a:xfrm>
           <a:prstGeom prst="rect">
             <a:avLst/>
@@ -5903,10 +5806,10 @@
       </p:pic>
       <p:pic>
         <p:nvPicPr>
-          <p:cNvPr id="9" name="Picture 8">
-            <a:extLst>
-              <a:ext uri="{FF2B5EF4-FFF2-40B4-BE49-F238E27FC236}">
-                <a16:creationId xmlns:a16="http://schemas.microsoft.com/office/drawing/2014/main" id="{5B958036-1030-D077-915B-BB2C30084800}"/>
+          <p:cNvPr id="8" name="Picture 7">
+            <a:extLst>
+              <a:ext uri="{FF2B5EF4-FFF2-40B4-BE49-F238E27FC236}">
+                <a16:creationId xmlns:a16="http://schemas.microsoft.com/office/drawing/2014/main" id="{43213890-F96D-5902-190C-F3C5C09D2315}"/>
               </a:ext>
             </a:extLst>
           </p:cNvPr>
@@ -5916,15 +5819,21 @@
           <p:nvPr/>
         </p:nvPicPr>
         <p:blipFill>
-          <a:blip r:embed="rId5"/>
+          <a:blip r:embed="rId3">
+            <a:extLst>
+              <a:ext uri="{28A0092B-C50C-407E-A947-70E740481C1C}">
+                <a14:useLocalDpi xmlns:a14="http://schemas.microsoft.com/office/drawing/2010/main" val="0"/>
+              </a:ext>
+            </a:extLst>
+          </a:blip>
           <a:stretch>
             <a:fillRect/>
           </a:stretch>
         </p:blipFill>
         <p:spPr>
           <a:xfrm>
-            <a:off x="6096000" y="686039"/>
-            <a:ext cx="4990289" cy="2532155"/>
+            <a:off x="579839" y="3185700"/>
+            <a:ext cx="4206455" cy="2378520"/>
           </a:xfrm>
           <a:prstGeom prst="rect">
             <a:avLst/>
@@ -5936,10 +5845,94 @@
           </a:ln>
         </p:spPr>
       </p:pic>
+      <p:pic>
+        <p:nvPicPr>
+          <p:cNvPr id="14" name="Picture 13">
+            <a:extLst>
+              <a:ext uri="{FF2B5EF4-FFF2-40B4-BE49-F238E27FC236}">
+                <a16:creationId xmlns:a16="http://schemas.microsoft.com/office/drawing/2014/main" id="{FACF298F-B604-ADA4-2DD9-A4EA171A6BFF}"/>
+              </a:ext>
+            </a:extLst>
+          </p:cNvPr>
+          <p:cNvPicPr>
+            <a:picLocks noChangeAspect="1"/>
+          </p:cNvPicPr>
+          <p:nvPr/>
+        </p:nvPicPr>
+        <p:blipFill>
+          <a:blip r:embed="rId4">
+            <a:extLst>
+              <a:ext uri="{28A0092B-C50C-407E-A947-70E740481C1C}">
+                <a14:useLocalDpi xmlns:a14="http://schemas.microsoft.com/office/drawing/2010/main" val="0"/>
+              </a:ext>
+            </a:extLst>
+          </a:blip>
+          <a:srcRect l="7734" t="49645" r="42031"/>
+          <a:stretch>
+            <a:fillRect/>
+          </a:stretch>
+        </p:blipFill>
+        <p:spPr>
+          <a:xfrm>
+            <a:off x="5353050" y="3185700"/>
+            <a:ext cx="5153024" cy="2378520"/>
+          </a:xfrm>
+          <a:prstGeom prst="rect">
+            <a:avLst/>
+          </a:prstGeom>
+          <a:ln>
+            <a:solidFill>
+              <a:schemeClr val="tx1"/>
+            </a:solidFill>
+          </a:ln>
+        </p:spPr>
+      </p:pic>
+      <p:pic>
+        <p:nvPicPr>
+          <p:cNvPr id="16" name="Picture 15">
+            <a:extLst>
+              <a:ext uri="{FF2B5EF4-FFF2-40B4-BE49-F238E27FC236}">
+                <a16:creationId xmlns:a16="http://schemas.microsoft.com/office/drawing/2014/main" id="{13DC8247-75AB-095B-7212-DDD9FCC30FB7}"/>
+              </a:ext>
+            </a:extLst>
+          </p:cNvPr>
+          <p:cNvPicPr>
+            <a:picLocks noChangeAspect="1"/>
+          </p:cNvPicPr>
+          <p:nvPr/>
+        </p:nvPicPr>
+        <p:blipFill>
+          <a:blip r:embed="rId4">
+            <a:extLst>
+              <a:ext uri="{28A0092B-C50C-407E-A947-70E740481C1C}">
+                <a14:useLocalDpi xmlns:a14="http://schemas.microsoft.com/office/drawing/2010/main" val="0"/>
+              </a:ext>
+            </a:extLst>
+          </a:blip>
+          <a:srcRect b="49645"/>
+          <a:stretch>
+            <a:fillRect/>
+          </a:stretch>
+        </p:blipFill>
+        <p:spPr>
+          <a:xfrm>
+            <a:off x="5353049" y="611306"/>
+            <a:ext cx="5153025" cy="2171681"/>
+          </a:xfrm>
+          <a:prstGeom prst="rect">
+            <a:avLst/>
+          </a:prstGeom>
+          <a:ln>
+            <a:solidFill>
+              <a:schemeClr val="tx1"/>
+            </a:solidFill>
+          </a:ln>
+        </p:spPr>
+      </p:pic>
     </p:spTree>
     <p:extLst>
       <p:ext uri="{BB962C8B-B14F-4D97-AF65-F5344CB8AC3E}">
-        <p14:creationId xmlns:p14="http://schemas.microsoft.com/office/powerpoint/2010/main" val="2987574774"/>
+        <p14:creationId xmlns:p14="http://schemas.microsoft.com/office/powerpoint/2010/main" val="774738043"/>
       </p:ext>
     </p:extLst>
   </p:cSld>
@@ -6029,7 +6022,7 @@
         <p:spPr>
           <a:xfrm>
             <a:off x="282102" y="865761"/>
-            <a:ext cx="10385898" cy="5000018"/>
+            <a:ext cx="10385898" cy="5315964"/>
           </a:xfrm>
         </p:spPr>
         <p:txBody>
@@ -6044,7 +6037,7 @@
             </a:pPr>
             <a:r>
               <a:rPr lang="en-US" sz="2000" dirty="0"/>
-              <a:t>Launch a Customer Retention Campaign: Since only 2.3% of customers return within 6 months, we urgently need to create an automated email campaign offering a special discount for a customer's second purchase.</a:t>
+              <a:t>Focus Marketing on Sao Paulo: The data clearly shows Sao Paulo is our strongest market. We should allocate the largest portion of our advertising budget and offer faster shipping options in this specific region to maximize sales.</a:t>
             </a:r>
           </a:p>
           <a:p>
@@ -6058,7 +6051,7 @@
             </a:pPr>
             <a:r>
               <a:rPr lang="en-US" sz="2000" dirty="0"/>
-              <a:t>Focus Marketing on Sao Paulo: The data clearly shows Sao Paulo is our strongest market. We should allocate the largest portion of our advertising budget and offer faster shipping options in this specific region to maximize sales.</a:t>
+              <a:t>Promote Installment Options: With over 50% of orders paid in installments, this feature is critical to our success. We should make "Pay in Installments" highly visible on every product page to encourage more people to buy.</a:t>
             </a:r>
           </a:p>
           <a:p>
@@ -6072,7 +6065,7 @@
             </a:pPr>
             <a:r>
               <a:rPr lang="en-US" sz="2000" dirty="0"/>
-              <a:t>Promote Installment Options: With over 50% of orders paid in installments, this feature is critical to our success. We should make "Pay in Installments" highly visible on every product page to encourage more people to buy.</a:t>
+              <a:t>Create a VIP Seller Program: A small group of top sellers generates most of the revenue. We should assign them dedicated support managers or give them lower platform fees to ensure they don't leave for a competitor.</a:t>
             </a:r>
           </a:p>
           <a:p>
@@ -6086,8 +6079,22 @@
             </a:pPr>
             <a:r>
               <a:rPr lang="en-US" sz="2000" dirty="0"/>
-              <a:t>Create a VIP Seller Program: A small group of top sellers generates most of the revenue. We should assign them dedicated support managers or give them lower platform fees to ensure they don't leave for a competitor.</a:t>
-            </a:r>
+              <a:t>Launch a Customer Retention Campaign: Since 0% of retention rate,</a:t>
+            </a:r>
+            <a:r>
+              <a:rPr lang="en-IN" sz="2000" dirty="0"/>
+              <a:t> indicating that first-time buyers are not returning to make a second purchase within 6 months.</a:t>
+            </a:r>
+            <a:r>
+              <a:rPr lang="en-US" sz="2000" dirty="0"/>
+              <a:t> we urgently need to create an automated email campaign offering a special discount for a customer's second purchase.</a:t>
+            </a:r>
+          </a:p>
+          <a:p>
+            <a:pPr marL="342900" indent="-342900" algn="l">
+              <a:buFont typeface="Arial" panose="020B0604020202020204" pitchFamily="34" charset="0"/>
+              <a:buChar char="•"/>
+            </a:pPr>
             <a:endParaRPr lang="en-IN" sz="2000" dirty="0"/>
           </a:p>
         </p:txBody>
